--- a/figures/workflow_mesure.pptx
+++ b/figures/workflow_mesure.pptx
@@ -4,14 +4,14 @@
   <p:sldMasterIdLst>
     <p:sldMasterId id="2147483648" r:id="rId1"/>
   </p:sldMasterIdLst>
+  <p:sldIdLst>
+    <p:sldId id="256" r:id="rId2"/>
+  </p:sldIdLst>
   <p:notesMasterIdLst>
     <p:notesMasterId r:id="rId3"/>
   </p:notesMasterIdLst>
-  <p:sldIdLst>
-    <p:sldId id="256" r:id="rId2"/>
-  </p:sldIdLst>
-  <p:sldSz cx="16916400" cy="8888413"/>
-  <p:notesSz cx="8888413" cy="16916400"/>
+  <p:sldSz cx="16916400" cy="8887968"/>
+  <p:notesSz cx="8887968" cy="16916400"/>
   <p:defaultTextStyle>
     <a:lvl1pPr marL="0" algn="l" defTabSz="914400" rtl="0" eaLnBrk="1" latinLnBrk="0" hangingPunct="1">
       <a:defRPr sz="1800" kern="1200">
@@ -104,11 +104,6 @@
       </a:defRPr>
     </a:lvl9pPr>
   </p:defaultTextStyle>
-  <p:extLst>
-    <p:ext uri="{EFAFB233-063F-42B5-8137-9DF3F51BA10A}">
-      <p15:sldGuideLst xmlns:p15="http://schemas.microsoft.com/office/powerpoint/2012/main"/>
-    </p:ext>
-  </p:extLst>
 </p:presentation>
 </file>
 
@@ -134,10 +129,234 @@
           <a:chExt cx="0" cy="0"/>
         </a:xfrm>
       </p:grpSpPr>
+      <p:sp>
+        <p:nvSpPr>
+          <p:cNvPr id="2" name="Header Placeholder 1"/>
+          <p:cNvSpPr>
+            <a:spLocks noGrp="1"/>
+          </p:cNvSpPr>
+          <p:nvPr>
+            <p:ph type="hdr" sz="quarter"/>
+          </p:nvPr>
+        </p:nvSpPr>
+        <p:spPr>
+          <a:xfrm>
+            <a:off x="0" y="0"/>
+            <a:ext cx="2971800" cy="458788"/>
+          </a:xfrm>
+          <a:prstGeom prst="rect">
+            <a:avLst/>
+          </a:prstGeom>
+        </p:spPr>
+        <p:txBody>
+          <a:bodyPr vert="horz" lIns="91440" tIns="45720" rIns="91440" bIns="45720" rtlCol="0"/>
+          <a:lstStyle>
+            <a:lvl1pPr algn="l">
+              <a:defRPr sz="1200"/>
+            </a:lvl1pPr>
+          </a:lstStyle>
+          <a:p>
+            <a:endParaRPr lang="en-US"/>
+          </a:p>
+        </p:txBody>
+      </p:sp>
+      <p:sp>
+        <p:nvSpPr>
+          <p:cNvPr id="3" name="Date Placeholder 2"/>
+          <p:cNvSpPr>
+            <a:spLocks noGrp="1"/>
+          </p:cNvSpPr>
+          <p:nvPr>
+            <p:ph type="dt" idx="1"/>
+          </p:nvPr>
+        </p:nvSpPr>
+        <p:spPr>
+          <a:xfrm>
+            <a:off x="3884613" y="0"/>
+            <a:ext cx="2971800" cy="458788"/>
+          </a:xfrm>
+          <a:prstGeom prst="rect">
+            <a:avLst/>
+          </a:prstGeom>
+        </p:spPr>
+        <p:txBody>
+          <a:bodyPr vert="horz" lIns="91440" tIns="45720" rIns="91440" bIns="45720" rtlCol="0"/>
+          <a:lstStyle>
+            <a:lvl1pPr algn="r">
+              <a:defRPr sz="1200"/>
+            </a:lvl1pPr>
+          </a:lstStyle>
+          <a:p>
+            <a:fld id="{5282F153-3F37-0F45-9E97-73ACFA13230C}" type="datetimeFigureOut">
+              <a:rPr lang="en-US"/>
+              <a:t>7/23/19</a:t>
+            </a:fld>
+            <a:endParaRPr lang="en-US"/>
+          </a:p>
+        </p:txBody>
+      </p:sp>
+      <p:sp>
+        <p:nvSpPr>
+          <p:cNvPr id="4" name="Slide Image Placeholder 3"/>
+          <p:cNvSpPr>
+            <a:spLocks noGrp="1" noRot="1" noChangeAspect="1"/>
+          </p:cNvSpPr>
+          <p:nvPr>
+            <p:ph type="sldImg" idx="2"/>
+          </p:nvPr>
+        </p:nvSpPr>
+        <p:spPr>
+          <a:xfrm>
+            <a:off x="685800" y="1143000"/>
+            <a:ext cx="5486400" cy="3086100"/>
+          </a:xfrm>
+          <a:prstGeom prst="rect">
+            <a:avLst/>
+          </a:prstGeom>
+          <a:noFill/>
+          <a:ln w="12700">
+            <a:solidFill>
+              <a:prstClr val="black"/>
+            </a:solidFill>
+          </a:ln>
+        </p:spPr>
+        <p:txBody>
+          <a:bodyPr vert="horz" lIns="91440" tIns="45720" rIns="91440" bIns="45720" rtlCol="0" anchor="ctr"/>
+          <a:lstStyle/>
+          <a:p>
+            <a:endParaRPr lang="en-US"/>
+          </a:p>
+        </p:txBody>
+      </p:sp>
+      <p:sp>
+        <p:nvSpPr>
+          <p:cNvPr id="5" name="Notes Placeholder 4"/>
+          <p:cNvSpPr>
+            <a:spLocks noGrp="1"/>
+          </p:cNvSpPr>
+          <p:nvPr>
+            <p:ph type="body" sz="quarter" idx="3"/>
+          </p:nvPr>
+        </p:nvSpPr>
+        <p:spPr>
+          <a:xfrm>
+            <a:off x="685800" y="4400550"/>
+            <a:ext cx="5486400" cy="3600450"/>
+          </a:xfrm>
+          <a:prstGeom prst="rect">
+            <a:avLst/>
+          </a:prstGeom>
+        </p:spPr>
+        <p:txBody>
+          <a:bodyPr vert="horz" lIns="91440" tIns="45720" rIns="91440" bIns="45720" rtlCol="0"/>
+          <a:lstStyle/>
+          <a:p>
+            <a:pPr lvl="0"/>
+            <a:r>
+              <a:rPr lang="en-US"/>
+              <a:t>Click to edit Master text styles</a:t>
+            </a:r>
+          </a:p>
+          <a:p>
+            <a:pPr lvl="1"/>
+            <a:r>
+              <a:rPr lang="en-US"/>
+              <a:t>Second level</a:t>
+            </a:r>
+          </a:p>
+          <a:p>
+            <a:pPr lvl="2"/>
+            <a:r>
+              <a:rPr lang="en-US"/>
+              <a:t>Third level</a:t>
+            </a:r>
+          </a:p>
+          <a:p>
+            <a:pPr lvl="3"/>
+            <a:r>
+              <a:rPr lang="en-US"/>
+              <a:t>Fourth level</a:t>
+            </a:r>
+          </a:p>
+          <a:p>
+            <a:pPr lvl="4"/>
+            <a:r>
+              <a:rPr lang="en-US"/>
+              <a:t>Fifth level</a:t>
+            </a:r>
+          </a:p>
+        </p:txBody>
+      </p:sp>
+      <p:sp>
+        <p:nvSpPr>
+          <p:cNvPr id="6" name="Footer Placeholder 5"/>
+          <p:cNvSpPr>
+            <a:spLocks noGrp="1"/>
+          </p:cNvSpPr>
+          <p:nvPr>
+            <p:ph type="ftr" sz="quarter" idx="4"/>
+          </p:nvPr>
+        </p:nvSpPr>
+        <p:spPr>
+          <a:xfrm>
+            <a:off x="0" y="8685213"/>
+            <a:ext cx="2971800" cy="458787"/>
+          </a:xfrm>
+          <a:prstGeom prst="rect">
+            <a:avLst/>
+          </a:prstGeom>
+        </p:spPr>
+        <p:txBody>
+          <a:bodyPr vert="horz" lIns="91440" tIns="45720" rIns="91440" bIns="45720" rtlCol="0" anchor="b"/>
+          <a:lstStyle>
+            <a:lvl1pPr algn="l">
+              <a:defRPr sz="1200"/>
+            </a:lvl1pPr>
+          </a:lstStyle>
+          <a:p>
+            <a:endParaRPr lang="en-US"/>
+          </a:p>
+        </p:txBody>
+      </p:sp>
+      <p:sp>
+        <p:nvSpPr>
+          <p:cNvPr id="7" name="Slide Number Placeholder 6"/>
+          <p:cNvSpPr>
+            <a:spLocks noGrp="1"/>
+          </p:cNvSpPr>
+          <p:nvPr>
+            <p:ph type="sldNum" sz="quarter" idx="5"/>
+          </p:nvPr>
+        </p:nvSpPr>
+        <p:spPr>
+          <a:xfrm>
+            <a:off x="3884613" y="8685213"/>
+            <a:ext cx="2971800" cy="458787"/>
+          </a:xfrm>
+          <a:prstGeom prst="rect">
+            <a:avLst/>
+          </a:prstGeom>
+        </p:spPr>
+        <p:txBody>
+          <a:bodyPr vert="horz" lIns="91440" tIns="45720" rIns="91440" bIns="45720" rtlCol="0" anchor="b"/>
+          <a:lstStyle>
+            <a:lvl1pPr algn="r">
+              <a:defRPr sz="1200"/>
+            </a:lvl1pPr>
+          </a:lstStyle>
+          <a:p>
+            <a:fld id="{CE5E9CC1-C706-0F49-92D6-E571CC5EEA8F}" type="slidenum">
+              <a:rPr lang="en-US"/>
+              <a:t>‹#›</a:t>
+            </a:fld>
+            <a:endParaRPr lang="en-US"/>
+          </a:p>
+        </p:txBody>
+      </p:sp>
     </p:spTree>
     <p:extLst>
       <p:ext uri="{BB962C8B-B14F-4D97-AF65-F5344CB8AC3E}">
-        <p14:creationId xmlns:p14="http://schemas.microsoft.com/office/powerpoint/2010/main" val="222459024"/>
+        <p14:creationId xmlns:p14="http://schemas.microsoft.com/office/powerpoint/2010/main" val="1024086991"/>
       </p:ext>
     </p:extLst>
   </p:cSld>
@@ -281,6 +500,10 @@
           <a:bodyPr/>
           <a:lstStyle/>
           <a:p>
+            <a:r>
+              <a:rPr lang="en-US" dirty="0"/>
+              <a:t/>
+            </a:r>
             <a:endParaRPr lang="en-US" dirty="0"/>
           </a:p>
         </p:txBody>
@@ -354,11 +577,6 @@
 <file path=ppt/slideMasters/slideMaster1.xml><?xml version="1.0" encoding="utf-8"?>
 <p:sldMaster xmlns:a="http://schemas.openxmlformats.org/drawingml/2006/main" xmlns:r="http://schemas.openxmlformats.org/officeDocument/2006/relationships" xmlns:p="http://schemas.openxmlformats.org/presentationml/2006/main">
   <p:cSld>
-    <p:bg>
-      <p:bgRef idx="1001">
-        <a:schemeClr val="bg1"/>
-      </p:bgRef>
-    </p:bg>
     <p:spTree>
       <p:nvGrpSpPr>
         <p:cNvPr id="1" name=""/>
@@ -641,7 +859,6 @@
         <a:solidFill>
           <a:srgbClr val="FFFFFF"/>
         </a:solidFill>
-        <a:effectLst/>
       </p:bgPr>
     </p:bg>
     <p:spTree>
@@ -682,13 +899,6 @@
             <a:prstDash val="solid"/>
           </a:ln>
         </p:spPr>
-        <p:txBody>
-          <a:bodyPr/>
-          <a:lstStyle/>
-          <a:p>
-            <a:endParaRPr lang="zh-CN" altLang="en-US"/>
-          </a:p>
-        </p:txBody>
       </p:sp>
       <p:sp>
         <p:nvSpPr>
@@ -714,13 +924,6 @@
             <a:prstDash val="solid"/>
           </a:ln>
         </p:spPr>
-        <p:txBody>
-          <a:bodyPr/>
-          <a:lstStyle/>
-          <a:p>
-            <a:endParaRPr lang="zh-CN" altLang="en-US"/>
-          </a:p>
-        </p:txBody>
       </p:sp>
       <p:sp>
         <p:nvSpPr>
@@ -743,7 +946,7 @@
           <a:bodyPr wrap="square" lIns="0" tIns="0" rIns="0" bIns="0" rtlCol="0" anchor="ctr"/>
           <a:lstStyle/>
           <a:p>
-            <a:pPr marL="0" indent="0" algn="ctr">
+            <a:pPr algn="ctr" indent="0" marL="0">
               <a:buNone/>
             </a:pPr>
             <a:r>
@@ -782,7 +985,7 @@
           <a:bodyPr wrap="square" lIns="0" tIns="0" rIns="0" bIns="0" rtlCol="0" anchor="ctr"/>
           <a:lstStyle/>
           <a:p>
-            <a:pPr marL="0" indent="0" algn="ctr">
+            <a:pPr algn="ctr" indent="0" marL="0">
               <a:buNone/>
             </a:pPr>
             <a:r>
@@ -799,7 +1002,7 @@
             <a:endParaRPr lang="en-US" sz="1130" dirty="0"/>
           </a:p>
           <a:p>
-            <a:pPr marL="0" indent="0" algn="ctr">
+            <a:pPr algn="ctr" indent="0" marL="0">
               <a:buNone/>
             </a:pPr>
             <a:r>
@@ -816,7 +1019,7 @@
             <a:endParaRPr lang="en-US" sz="1130" dirty="0"/>
           </a:p>
           <a:p>
-            <a:pPr marL="0" indent="0" algn="ctr">
+            <a:pPr algn="ctr" indent="0" marL="0">
               <a:buNone/>
             </a:pPr>
             <a:r>
@@ -833,7 +1036,7 @@
             <a:endParaRPr lang="en-US" sz="1130" dirty="0"/>
           </a:p>
           <a:p>
-            <a:pPr marL="0" indent="0" algn="ctr">
+            <a:pPr algn="ctr" indent="0" marL="0">
               <a:buNone/>
             </a:pPr>
             <a:r>
@@ -872,7 +1075,7 @@
           <a:bodyPr wrap="square" lIns="0" tIns="0" rIns="0" bIns="0" rtlCol="0" anchor="ctr"/>
           <a:lstStyle/>
           <a:p>
-            <a:pPr marL="0" indent="0" algn="ctr">
+            <a:pPr algn="ctr" indent="0" marL="0">
               <a:buNone/>
             </a:pPr>
             <a:r>
@@ -889,7 +1092,7 @@
             <a:endParaRPr lang="en-US" sz="940" dirty="0"/>
           </a:p>
           <a:p>
-            <a:pPr marL="0" indent="0" algn="ctr">
+            <a:pPr algn="ctr" indent="0" marL="0">
               <a:buNone/>
             </a:pPr>
             <a:r>
@@ -931,13 +1134,6 @@
             <a:prstDash val="solid"/>
           </a:ln>
         </p:spPr>
-        <p:txBody>
-          <a:bodyPr/>
-          <a:lstStyle/>
-          <a:p>
-            <a:endParaRPr lang="zh-CN" altLang="en-US"/>
-          </a:p>
-        </p:txBody>
       </p:sp>
       <p:sp>
         <p:nvSpPr>
@@ -963,13 +1159,6 @@
             <a:prstDash val="solid"/>
           </a:ln>
         </p:spPr>
-        <p:txBody>
-          <a:bodyPr/>
-          <a:lstStyle/>
-          <a:p>
-            <a:endParaRPr lang="zh-CN" altLang="en-US"/>
-          </a:p>
-        </p:txBody>
       </p:sp>
       <p:sp>
         <p:nvSpPr>
@@ -992,7 +1181,7 @@
           <a:bodyPr wrap="square" lIns="0" tIns="0" rIns="0" bIns="0" rtlCol="0" anchor="ctr"/>
           <a:lstStyle/>
           <a:p>
-            <a:pPr marL="0" indent="0" algn="ctr">
+            <a:pPr algn="ctr" indent="0" marL="0">
               <a:buNone/>
             </a:pPr>
             <a:r>
@@ -1031,7 +1220,7 @@
           <a:bodyPr wrap="square" lIns="0" tIns="0" rIns="0" bIns="0" rtlCol="0" anchor="ctr"/>
           <a:lstStyle/>
           <a:p>
-            <a:pPr marL="0" indent="0" algn="ctr">
+            <a:pPr algn="ctr" indent="0" marL="0">
               <a:buNone/>
             </a:pPr>
             <a:r>
@@ -1048,7 +1237,7 @@
             <a:endParaRPr lang="en-US" sz="1020" dirty="0"/>
           </a:p>
           <a:p>
-            <a:pPr marL="0" indent="0" algn="ctr">
+            <a:pPr algn="ctr" indent="0" marL="0">
               <a:buNone/>
             </a:pPr>
             <a:r>
@@ -1065,7 +1254,7 @@
             <a:endParaRPr lang="en-US" sz="1020" dirty="0"/>
           </a:p>
           <a:p>
-            <a:pPr marL="0" indent="0" algn="ctr">
+            <a:pPr algn="ctr" indent="0" marL="0">
               <a:buNone/>
             </a:pPr>
             <a:r>
@@ -1082,7 +1271,7 @@
             <a:endParaRPr lang="en-US" sz="1020" dirty="0"/>
           </a:p>
           <a:p>
-            <a:pPr marL="0" indent="0" algn="ctr">
+            <a:pPr algn="ctr" indent="0" marL="0">
               <a:buNone/>
             </a:pPr>
             <a:r>
@@ -1099,7 +1288,7 @@
             <a:endParaRPr lang="en-US" sz="1020" dirty="0"/>
           </a:p>
           <a:p>
-            <a:pPr marL="0" indent="0" algn="ctr">
+            <a:pPr algn="ctr" indent="0" marL="0">
               <a:buNone/>
             </a:pPr>
             <a:r>
@@ -1116,7 +1305,7 @@
             <a:endParaRPr lang="en-US" sz="1020" dirty="0"/>
           </a:p>
           <a:p>
-            <a:pPr marL="0" indent="0" algn="ctr">
+            <a:pPr algn="ctr" indent="0" marL="0">
               <a:buNone/>
             </a:pPr>
             <a:r>
@@ -1133,7 +1322,7 @@
             <a:endParaRPr lang="en-US" sz="1020" dirty="0"/>
           </a:p>
           <a:p>
-            <a:pPr marL="0" indent="0" algn="ctr">
+            <a:pPr algn="ctr" indent="0" marL="0">
               <a:buNone/>
             </a:pPr>
             <a:r>
@@ -1150,7 +1339,7 @@
             <a:endParaRPr lang="en-US" sz="1020" dirty="0"/>
           </a:p>
           <a:p>
-            <a:pPr marL="0" indent="0" algn="ctr">
+            <a:pPr algn="ctr" indent="0" marL="0">
               <a:buNone/>
             </a:pPr>
             <a:r>
@@ -1192,13 +1381,6 @@
             <a:prstDash val="solid"/>
           </a:ln>
         </p:spPr>
-        <p:txBody>
-          <a:bodyPr/>
-          <a:lstStyle/>
-          <a:p>
-            <a:endParaRPr lang="zh-CN" altLang="en-US"/>
-          </a:p>
-        </p:txBody>
       </p:sp>
       <p:sp>
         <p:nvSpPr>
@@ -1224,13 +1406,6 @@
             <a:prstDash val="solid"/>
           </a:ln>
         </p:spPr>
-        <p:txBody>
-          <a:bodyPr/>
-          <a:lstStyle/>
-          <a:p>
-            <a:endParaRPr lang="zh-CN" altLang="en-US"/>
-          </a:p>
-        </p:txBody>
       </p:sp>
       <p:sp>
         <p:nvSpPr>
@@ -1253,7 +1428,7 @@
           <a:bodyPr wrap="square" lIns="0" tIns="0" rIns="0" bIns="0" rtlCol="0" anchor="ctr"/>
           <a:lstStyle/>
           <a:p>
-            <a:pPr marL="0" indent="0" algn="ctr">
+            <a:pPr algn="ctr" indent="0" marL="0">
               <a:buNone/>
             </a:pPr>
             <a:r>
@@ -1270,7 +1445,7 @@
             <a:endParaRPr lang="en-US" sz="1050" dirty="0"/>
           </a:p>
           <a:p>
-            <a:pPr marL="0" indent="0" algn="ctr">
+            <a:pPr algn="ctr" indent="0" marL="0">
               <a:buNone/>
             </a:pPr>
             <a:r>
@@ -1309,7 +1484,7 @@
           <a:bodyPr wrap="square" lIns="0" tIns="0" rIns="0" bIns="0" rtlCol="0" anchor="ctr"/>
           <a:lstStyle/>
           <a:p>
-            <a:pPr marL="0" indent="0" algn="ctr">
+            <a:pPr algn="ctr" indent="0" marL="0">
               <a:buNone/>
             </a:pPr>
             <a:r>
@@ -1326,7 +1501,7 @@
             <a:endParaRPr lang="en-US" sz="940" dirty="0"/>
           </a:p>
           <a:p>
-            <a:pPr marL="0" indent="0" algn="ctr">
+            <a:pPr algn="ctr" indent="0" marL="0">
               <a:buNone/>
             </a:pPr>
             <a:r>
@@ -1343,7 +1518,7 @@
             <a:endParaRPr lang="en-US" sz="940" dirty="0"/>
           </a:p>
           <a:p>
-            <a:pPr marL="0" indent="0" algn="ctr">
+            <a:pPr algn="ctr" indent="0" marL="0">
               <a:buNone/>
             </a:pPr>
             <a:r>
@@ -1360,7 +1535,7 @@
             <a:endParaRPr lang="en-US" sz="940" dirty="0"/>
           </a:p>
           <a:p>
-            <a:pPr marL="0" indent="0" algn="ctr">
+            <a:pPr algn="ctr" indent="0" marL="0">
               <a:buNone/>
             </a:pPr>
             <a:r>
@@ -1377,7 +1552,7 @@
             <a:endParaRPr lang="en-US" sz="940" dirty="0"/>
           </a:p>
           <a:p>
-            <a:pPr marL="0" indent="0" algn="ctr">
+            <a:pPr algn="ctr" indent="0" marL="0">
               <a:buNone/>
             </a:pPr>
             <a:r>
@@ -1417,13 +1592,6 @@
             <a:prstDash val="solid"/>
           </a:ln>
         </p:spPr>
-        <p:txBody>
-          <a:bodyPr/>
-          <a:lstStyle/>
-          <a:p>
-            <a:endParaRPr lang="zh-CN" altLang="en-US"/>
-          </a:p>
-        </p:txBody>
       </p:sp>
       <p:sp>
         <p:nvSpPr>
@@ -1449,13 +1617,6 @@
             <a:prstDash val="solid"/>
           </a:ln>
         </p:spPr>
-        <p:txBody>
-          <a:bodyPr/>
-          <a:lstStyle/>
-          <a:p>
-            <a:endParaRPr lang="zh-CN" altLang="en-US"/>
-          </a:p>
-        </p:txBody>
       </p:sp>
       <p:sp>
         <p:nvSpPr>
@@ -1481,13 +1642,6 @@
             <a:prstDash val="solid"/>
           </a:ln>
         </p:spPr>
-        <p:txBody>
-          <a:bodyPr/>
-          <a:lstStyle/>
-          <a:p>
-            <a:endParaRPr lang="zh-CN" altLang="en-US"/>
-          </a:p>
-        </p:txBody>
       </p:sp>
       <p:sp>
         <p:nvSpPr>
@@ -1513,13 +1667,6 @@
             <a:prstDash val="solid"/>
           </a:ln>
         </p:spPr>
-        <p:txBody>
-          <a:bodyPr/>
-          <a:lstStyle/>
-          <a:p>
-            <a:endParaRPr lang="zh-CN" altLang="en-US"/>
-          </a:p>
-        </p:txBody>
       </p:sp>
       <p:sp>
         <p:nvSpPr>
@@ -1545,13 +1692,6 @@
             <a:prstDash val="solid"/>
           </a:ln>
         </p:spPr>
-        <p:txBody>
-          <a:bodyPr/>
-          <a:lstStyle/>
-          <a:p>
-            <a:endParaRPr lang="zh-CN" altLang="en-US"/>
-          </a:p>
-        </p:txBody>
       </p:sp>
       <p:sp>
         <p:nvSpPr>
@@ -1577,13 +1717,6 @@
             <a:prstDash val="solid"/>
           </a:ln>
         </p:spPr>
-        <p:txBody>
-          <a:bodyPr/>
-          <a:lstStyle/>
-          <a:p>
-            <a:endParaRPr lang="zh-CN" altLang="en-US"/>
-          </a:p>
-        </p:txBody>
       </p:sp>
       <p:sp>
         <p:nvSpPr>
@@ -1609,13 +1742,6 @@
             <a:prstDash val="solid"/>
           </a:ln>
         </p:spPr>
-        <p:txBody>
-          <a:bodyPr/>
-          <a:lstStyle/>
-          <a:p>
-            <a:endParaRPr lang="zh-CN" altLang="en-US"/>
-          </a:p>
-        </p:txBody>
       </p:sp>
       <p:sp>
         <p:nvSpPr>
@@ -1641,13 +1767,6 @@
             <a:prstDash val="solid"/>
           </a:ln>
         </p:spPr>
-        <p:txBody>
-          <a:bodyPr/>
-          <a:lstStyle/>
-          <a:p>
-            <a:endParaRPr lang="zh-CN" altLang="en-US"/>
-          </a:p>
-        </p:txBody>
       </p:sp>
       <p:sp>
         <p:nvSpPr>
@@ -1673,13 +1792,6 @@
             <a:prstDash val="solid"/>
           </a:ln>
         </p:spPr>
-        <p:txBody>
-          <a:bodyPr/>
-          <a:lstStyle/>
-          <a:p>
-            <a:endParaRPr lang="zh-CN" altLang="en-US"/>
-          </a:p>
-        </p:txBody>
       </p:sp>
       <p:sp>
         <p:nvSpPr>
@@ -1705,13 +1817,6 @@
             <a:prstDash val="solid"/>
           </a:ln>
         </p:spPr>
-        <p:txBody>
-          <a:bodyPr/>
-          <a:lstStyle/>
-          <a:p>
-            <a:endParaRPr lang="zh-CN" altLang="en-US"/>
-          </a:p>
-        </p:txBody>
       </p:sp>
       <p:sp>
         <p:nvSpPr>
@@ -1737,13 +1842,6 @@
             <a:prstDash val="solid"/>
           </a:ln>
         </p:spPr>
-        <p:txBody>
-          <a:bodyPr/>
-          <a:lstStyle/>
-          <a:p>
-            <a:endParaRPr lang="zh-CN" altLang="en-US"/>
-          </a:p>
-        </p:txBody>
       </p:sp>
       <p:sp>
         <p:nvSpPr>
@@ -1769,13 +1867,6 @@
             <a:prstDash val="solid"/>
           </a:ln>
         </p:spPr>
-        <p:txBody>
-          <a:bodyPr/>
-          <a:lstStyle/>
-          <a:p>
-            <a:endParaRPr lang="zh-CN" altLang="en-US"/>
-          </a:p>
-        </p:txBody>
       </p:sp>
       <p:sp>
         <p:nvSpPr>
@@ -1798,7 +1889,7 @@
           <a:bodyPr wrap="square" lIns="0" tIns="0" rIns="0" bIns="0" rtlCol="0" anchor="ctr"/>
           <a:lstStyle/>
           <a:p>
-            <a:pPr marL="0" indent="0" algn="ctr">
+            <a:pPr algn="ctr" indent="0" marL="0">
               <a:buNone/>
             </a:pPr>
             <a:r>
@@ -1815,7 +1906,7 @@
             <a:endParaRPr lang="en-US" sz="980" dirty="0"/>
           </a:p>
           <a:p>
-            <a:pPr marL="0" indent="0" algn="ctr">
+            <a:pPr algn="ctr" indent="0" marL="0">
               <a:buNone/>
             </a:pPr>
             <a:r>
@@ -1832,7 +1923,7 @@
             <a:endParaRPr lang="en-US" sz="980" dirty="0"/>
           </a:p>
           <a:p>
-            <a:pPr marL="0" indent="0" algn="ctr">
+            <a:pPr algn="ctr" indent="0" marL="0">
               <a:buNone/>
             </a:pPr>
             <a:r>
@@ -1874,13 +1965,6 @@
             <a:prstDash val="solid"/>
           </a:ln>
         </p:spPr>
-        <p:txBody>
-          <a:bodyPr/>
-          <a:lstStyle/>
-          <a:p>
-            <a:endParaRPr lang="zh-CN" altLang="en-US"/>
-          </a:p>
-        </p:txBody>
       </p:sp>
       <p:sp>
         <p:nvSpPr>
@@ -1906,13 +1990,6 @@
             <a:prstDash val="solid"/>
           </a:ln>
         </p:spPr>
-        <p:txBody>
-          <a:bodyPr/>
-          <a:lstStyle/>
-          <a:p>
-            <a:endParaRPr lang="zh-CN" altLang="en-US"/>
-          </a:p>
-        </p:txBody>
       </p:sp>
       <p:sp>
         <p:nvSpPr>
@@ -1938,13 +2015,6 @@
             <a:prstDash val="solid"/>
           </a:ln>
         </p:spPr>
-        <p:txBody>
-          <a:bodyPr/>
-          <a:lstStyle/>
-          <a:p>
-            <a:endParaRPr lang="zh-CN" altLang="en-US"/>
-          </a:p>
-        </p:txBody>
       </p:sp>
       <p:sp>
         <p:nvSpPr>
@@ -1970,13 +2040,6 @@
             <a:prstDash val="solid"/>
           </a:ln>
         </p:spPr>
-        <p:txBody>
-          <a:bodyPr/>
-          <a:lstStyle/>
-          <a:p>
-            <a:endParaRPr lang="zh-CN" altLang="en-US"/>
-          </a:p>
-        </p:txBody>
       </p:sp>
       <p:sp>
         <p:nvSpPr>
@@ -2002,13 +2065,6 @@
             <a:prstDash val="solid"/>
           </a:ln>
         </p:spPr>
-        <p:txBody>
-          <a:bodyPr/>
-          <a:lstStyle/>
-          <a:p>
-            <a:endParaRPr lang="zh-CN" altLang="en-US"/>
-          </a:p>
-        </p:txBody>
       </p:sp>
       <p:sp>
         <p:nvSpPr>
@@ -2034,13 +2090,6 @@
             <a:prstDash val="solid"/>
           </a:ln>
         </p:spPr>
-        <p:txBody>
-          <a:bodyPr/>
-          <a:lstStyle/>
-          <a:p>
-            <a:endParaRPr lang="zh-CN" altLang="en-US"/>
-          </a:p>
-        </p:txBody>
       </p:sp>
       <p:sp>
         <p:nvSpPr>
@@ -2066,13 +2115,6 @@
             <a:prstDash val="solid"/>
           </a:ln>
         </p:spPr>
-        <p:txBody>
-          <a:bodyPr/>
-          <a:lstStyle/>
-          <a:p>
-            <a:endParaRPr lang="zh-CN" altLang="en-US"/>
-          </a:p>
-        </p:txBody>
       </p:sp>
       <p:sp>
         <p:nvSpPr>
@@ -2098,13 +2140,6 @@
             <a:prstDash val="solid"/>
           </a:ln>
         </p:spPr>
-        <p:txBody>
-          <a:bodyPr/>
-          <a:lstStyle/>
-          <a:p>
-            <a:endParaRPr lang="zh-CN" altLang="en-US"/>
-          </a:p>
-        </p:txBody>
       </p:sp>
       <p:sp>
         <p:nvSpPr>
@@ -2130,13 +2165,6 @@
             <a:prstDash val="solid"/>
           </a:ln>
         </p:spPr>
-        <p:txBody>
-          <a:bodyPr/>
-          <a:lstStyle/>
-          <a:p>
-            <a:endParaRPr lang="zh-CN" altLang="en-US"/>
-          </a:p>
-        </p:txBody>
       </p:sp>
       <p:sp>
         <p:nvSpPr>
@@ -2162,13 +2190,6 @@
             <a:prstDash val="solid"/>
           </a:ln>
         </p:spPr>
-        <p:txBody>
-          <a:bodyPr/>
-          <a:lstStyle/>
-          <a:p>
-            <a:endParaRPr lang="zh-CN" altLang="en-US"/>
-          </a:p>
-        </p:txBody>
       </p:sp>
       <p:sp>
         <p:nvSpPr>
@@ -2194,13 +2215,6 @@
             <a:prstDash val="solid"/>
           </a:ln>
         </p:spPr>
-        <p:txBody>
-          <a:bodyPr/>
-          <a:lstStyle/>
-          <a:p>
-            <a:endParaRPr lang="zh-CN" altLang="en-US"/>
-          </a:p>
-        </p:txBody>
       </p:sp>
       <p:sp>
         <p:nvSpPr>
@@ -2228,13 +2242,6 @@
             <a:prstDash val="solid"/>
           </a:ln>
         </p:spPr>
-        <p:txBody>
-          <a:bodyPr/>
-          <a:lstStyle/>
-          <a:p>
-            <a:endParaRPr lang="zh-CN" altLang="en-US"/>
-          </a:p>
-        </p:txBody>
       </p:sp>
       <p:sp>
         <p:nvSpPr>
@@ -2257,7 +2264,7 @@
           <a:bodyPr wrap="square" lIns="0" tIns="0" rIns="0" bIns="0" rtlCol="0" anchor="ctr"/>
           <a:lstStyle/>
           <a:p>
-            <a:pPr marL="0" indent="0" algn="ctr">
+            <a:pPr algn="ctr" indent="0" marL="0">
               <a:buNone/>
             </a:pPr>
             <a:r>
@@ -2274,7 +2281,7 @@
             <a:endParaRPr lang="en-US" sz="940" dirty="0"/>
           </a:p>
           <a:p>
-            <a:pPr marL="0" indent="0" algn="ctr">
+            <a:pPr algn="ctr" indent="0" marL="0">
               <a:buNone/>
             </a:pPr>
             <a:r>
@@ -2287,23 +2294,6 @@
                 <a:cs typeface="Arial" pitchFamily="34" charset="-120"/>
               </a:rPr>
               <a:t>cleavage probabilities</a:t>
-            </a:r>
-            <a:endParaRPr lang="en-US" sz="940" dirty="0"/>
-          </a:p>
-          <a:p>
-            <a:pPr marL="0" indent="0" algn="ctr">
-              <a:buNone/>
-            </a:pPr>
-            <a:r>
-              <a:rPr lang="en-US" sz="940" dirty="0">
-                <a:solidFill>
-                  <a:srgbClr val="1A1A1A"/>
-                </a:solidFill>
-                <a:latin typeface="Arial" pitchFamily="34" charset="0"/>
-                <a:ea typeface="Arial" pitchFamily="34" charset="-122"/>
-                <a:cs typeface="Arial" pitchFamily="34" charset="-120"/>
-              </a:rPr>
-              <a:t>and theoretical spectra</a:t>
             </a:r>
             <a:endParaRPr lang="en-US" sz="940" dirty="0"/>
           </a:p>
@@ -2333,13 +2323,6 @@
             <a:prstDash val="solid"/>
           </a:ln>
         </p:spPr>
-        <p:txBody>
-          <a:bodyPr/>
-          <a:lstStyle/>
-          <a:p>
-            <a:endParaRPr lang="zh-CN" altLang="en-US"/>
-          </a:p>
-        </p:txBody>
       </p:sp>
       <p:sp>
         <p:nvSpPr>
@@ -2365,13 +2348,6 @@
             <a:prstDash val="solid"/>
           </a:ln>
         </p:spPr>
-        <p:txBody>
-          <a:bodyPr/>
-          <a:lstStyle/>
-          <a:p>
-            <a:endParaRPr lang="zh-CN" altLang="en-US"/>
-          </a:p>
-        </p:txBody>
       </p:sp>
       <p:sp>
         <p:nvSpPr>
@@ -2394,7 +2370,7 @@
           <a:bodyPr wrap="square" lIns="0" tIns="0" rIns="0" bIns="0" rtlCol="0" anchor="ctr"/>
           <a:lstStyle/>
           <a:p>
-            <a:pPr marL="0" indent="0" algn="ctr">
+            <a:pPr algn="ctr" indent="0" marL="0">
               <a:buNone/>
             </a:pPr>
             <a:r>
@@ -2411,7 +2387,7 @@
             <a:endParaRPr lang="en-US" sz="1050" dirty="0"/>
           </a:p>
           <a:p>
-            <a:pPr marL="0" indent="0" algn="ctr">
+            <a:pPr algn="ctr" indent="0" marL="0">
               <a:buNone/>
             </a:pPr>
             <a:r>
@@ -2450,7 +2426,7 @@
           <a:bodyPr wrap="square" lIns="0" tIns="0" rIns="0" bIns="0" rtlCol="0" anchor="ctr"/>
           <a:lstStyle/>
           <a:p>
-            <a:pPr marL="0" indent="0" algn="l">
+            <a:pPr algn="l" indent="0" marL="0">
               <a:buNone/>
             </a:pPr>
             <a:r>
@@ -2467,7 +2443,7 @@
             <a:endParaRPr lang="en-US" sz="980" dirty="0"/>
           </a:p>
           <a:p>
-            <a:pPr marL="0" indent="0" algn="l">
+            <a:pPr algn="l" indent="0" marL="0">
               <a:buNone/>
             </a:pPr>
             <a:r>
@@ -2484,7 +2460,7 @@
             <a:endParaRPr lang="en-US" sz="980" dirty="0"/>
           </a:p>
           <a:p>
-            <a:pPr marL="0" indent="0" algn="l">
+            <a:pPr algn="l" indent="0" marL="0">
               <a:buNone/>
             </a:pPr>
             <a:r>
@@ -2501,7 +2477,7 @@
             <a:endParaRPr lang="en-US" sz="980" dirty="0"/>
           </a:p>
           <a:p>
-            <a:pPr marL="0" indent="0" algn="l">
+            <a:pPr algn="l" indent="0" marL="0">
               <a:buNone/>
             </a:pPr>
             <a:r>
@@ -2518,7 +2494,7 @@
             <a:endParaRPr lang="en-US" sz="980" dirty="0"/>
           </a:p>
           <a:p>
-            <a:pPr marL="0" indent="0" algn="l">
+            <a:pPr algn="l" indent="0" marL="0">
               <a:buNone/>
             </a:pPr>
             <a:r>
@@ -2535,7 +2511,7 @@
             <a:endParaRPr lang="en-US" sz="980" dirty="0"/>
           </a:p>
           <a:p>
-            <a:pPr marL="0" indent="0" algn="l">
+            <a:pPr algn="l" indent="0" marL="0">
               <a:buNone/>
             </a:pPr>
             <a:r>
@@ -2552,7 +2528,7 @@
             <a:endParaRPr lang="en-US" sz="980" dirty="0"/>
           </a:p>
           <a:p>
-            <a:pPr marL="0" indent="0" algn="l">
+            <a:pPr algn="l" indent="0" marL="0">
               <a:buNone/>
             </a:pPr>
             <a:r>
@@ -2569,7 +2545,7 @@
             <a:endParaRPr lang="en-US" sz="980" dirty="0"/>
           </a:p>
           <a:p>
-            <a:pPr marL="0" indent="0" algn="l">
+            <a:pPr algn="l" indent="0" marL="0">
               <a:buNone/>
             </a:pPr>
             <a:r>
@@ -2608,7 +2584,7 @@
           <a:bodyPr wrap="square" lIns="0" tIns="0" rIns="0" bIns="0" rtlCol="0" anchor="ctr"/>
           <a:lstStyle/>
           <a:p>
-            <a:pPr marL="0" indent="0" algn="ctr">
+            <a:pPr algn="ctr" indent="0" marL="0">
               <a:buNone/>
             </a:pPr>
             <a:r>
@@ -2625,7 +2601,7 @@
             <a:endParaRPr lang="en-US" sz="940" dirty="0"/>
           </a:p>
           <a:p>
-            <a:pPr marL="0" indent="0" algn="ctr">
+            <a:pPr algn="ctr" indent="0" marL="0">
               <a:buNone/>
             </a:pPr>
             <a:r>
@@ -2651,7 +2627,7 @@
         </p:nvSpPr>
         <p:spPr>
           <a:xfrm>
-            <a:off x="14240866" y="401422"/>
+            <a:off x="14239951" y="382219"/>
             <a:ext cx="2293315" cy="2867558"/>
           </a:xfrm>
           <a:prstGeom prst="rect">
@@ -2667,13 +2643,6 @@
             <a:prstDash val="solid"/>
           </a:ln>
         </p:spPr>
-        <p:txBody>
-          <a:bodyPr/>
-          <a:lstStyle/>
-          <a:p>
-            <a:endParaRPr lang="zh-CN" altLang="en-US"/>
-          </a:p>
-        </p:txBody>
       </p:sp>
       <p:sp>
         <p:nvSpPr>
@@ -2699,13 +2668,6 @@
             <a:prstDash val="solid"/>
           </a:ln>
         </p:spPr>
-        <p:txBody>
-          <a:bodyPr/>
-          <a:lstStyle/>
-          <a:p>
-            <a:endParaRPr lang="zh-CN" altLang="en-US"/>
-          </a:p>
-        </p:txBody>
       </p:sp>
       <p:sp>
         <p:nvSpPr>
@@ -2728,7 +2690,7 @@
           <a:bodyPr wrap="square" lIns="0" tIns="0" rIns="0" bIns="0" rtlCol="0" anchor="ctr"/>
           <a:lstStyle/>
           <a:p>
-            <a:pPr marL="0" indent="0" algn="ctr">
+            <a:pPr algn="ctr" indent="0" marL="0">
               <a:buNone/>
             </a:pPr>
             <a:r>
@@ -2745,7 +2707,7 @@
             <a:endParaRPr lang="en-US" sz="1050" dirty="0"/>
           </a:p>
           <a:p>
-            <a:pPr marL="0" indent="0" algn="ctr">
+            <a:pPr algn="ctr" indent="0" marL="0">
               <a:buNone/>
             </a:pPr>
             <a:r>
@@ -2765,13 +2727,63 @@
       </p:sp>
       <p:sp>
         <p:nvSpPr>
+          <p:cNvPr id="49" name="Shape 47"/>
+          <p:cNvSpPr/>
+          <p:nvPr/>
+        </p:nvSpPr>
+        <p:spPr>
+          <a:xfrm>
+            <a:off x="15215616" y="1013155"/>
+            <a:ext cx="152705" cy="171907"/>
+          </a:xfrm>
+          <a:prstGeom prst="rect">
+            <a:avLst/>
+          </a:prstGeom>
+          <a:solidFill>
+            <a:srgbClr val="FFFFFF"/>
+          </a:solidFill>
+          <a:ln w="14336">
+            <a:solidFill>
+              <a:srgbClr val="5B7C99"/>
+            </a:solidFill>
+            <a:prstDash val="solid"/>
+          </a:ln>
+        </p:spPr>
+      </p:sp>
+      <p:sp>
+        <p:nvSpPr>
+          <p:cNvPr id="50" name="Shape 48"/>
+          <p:cNvSpPr/>
+          <p:nvPr/>
+        </p:nvSpPr>
+        <p:spPr>
+          <a:xfrm>
+            <a:off x="14966899" y="1165860"/>
+            <a:ext cx="554126" cy="592531"/>
+          </a:xfrm>
+          <a:prstGeom prst="triangle">
+            <a:avLst/>
+          </a:prstGeom>
+          <a:solidFill>
+            <a:srgbClr val="BDD7EE"/>
+          </a:solidFill>
+          <a:ln w="14336">
+            <a:solidFill>
+              <a:srgbClr val="5B7C99"/>
+            </a:solidFill>
+            <a:prstDash val="solid"/>
+          </a:ln>
+        </p:spPr>
+      </p:sp>
+      <p:sp>
+        <p:nvSpPr>
           <p:cNvPr id="51" name="Shape 49"/>
           <p:cNvSpPr/>
           <p:nvPr/>
         </p:nvSpPr>
         <p:spPr>
           <a:xfrm>
-            <a:off x="15687904" y="1910460"/>
+            <a:off x="15673730" y="1337767"/>
             <a:ext cx="114300" cy="114300"/>
           </a:xfrm>
           <a:prstGeom prst="ellipse">
@@ -2787,13 +2799,6 @@
             <a:prstDash val="solid"/>
           </a:ln>
         </p:spPr>
-        <p:txBody>
-          <a:bodyPr/>
-          <a:lstStyle/>
-          <a:p>
-            <a:endParaRPr lang="zh-CN" altLang="en-US"/>
-          </a:p>
-        </p:txBody>
       </p:sp>
       <p:sp>
         <p:nvSpPr>
@@ -2803,7 +2808,7 @@
         </p:nvSpPr>
         <p:spPr>
           <a:xfrm>
-            <a:off x="15564612" y="1739646"/>
+            <a:off x="15817291" y="1261872"/>
             <a:ext cx="114300" cy="114300"/>
           </a:xfrm>
           <a:prstGeom prst="ellipse">
@@ -2819,13 +2824,6 @@
             <a:prstDash val="solid"/>
           </a:ln>
         </p:spPr>
-        <p:txBody>
-          <a:bodyPr/>
-          <a:lstStyle/>
-          <a:p>
-            <a:endParaRPr lang="zh-CN" altLang="en-US"/>
-          </a:p>
-        </p:txBody>
       </p:sp>
       <p:sp>
         <p:nvSpPr>
@@ -2835,7 +2833,7 @@
         </p:nvSpPr>
         <p:spPr>
           <a:xfrm>
-            <a:off x="15745760" y="1605051"/>
+            <a:off x="15960852" y="1204265"/>
             <a:ext cx="114300" cy="114300"/>
           </a:xfrm>
           <a:prstGeom prst="ellipse">
@@ -2851,13 +2849,6 @@
             <a:prstDash val="solid"/>
           </a:ln>
         </p:spPr>
-        <p:txBody>
-          <a:bodyPr/>
-          <a:lstStyle/>
-          <a:p>
-            <a:endParaRPr lang="zh-CN" altLang="en-US"/>
-          </a:p>
-        </p:txBody>
       </p:sp>
       <p:sp>
         <p:nvSpPr>
@@ -2867,7 +2858,7 @@
         </p:nvSpPr>
         <p:spPr>
           <a:xfrm>
-            <a:off x="15650817" y="1377086"/>
+            <a:off x="16104413" y="1261872"/>
             <a:ext cx="114300" cy="114300"/>
           </a:xfrm>
           <a:prstGeom prst="ellipse">
@@ -2883,13 +2874,6 @@
             <a:prstDash val="solid"/>
           </a:ln>
         </p:spPr>
-        <p:txBody>
-          <a:bodyPr/>
-          <a:lstStyle/>
-          <a:p>
-            <a:endParaRPr lang="zh-CN" altLang="en-US"/>
-          </a:p>
-        </p:txBody>
       </p:sp>
       <p:sp>
         <p:nvSpPr>
@@ -2899,7 +2883,7 @@
         </p:nvSpPr>
         <p:spPr>
           <a:xfrm>
-            <a:off x="15832779" y="1262786"/>
+            <a:off x="16247059" y="1337767"/>
             <a:ext cx="114300" cy="114300"/>
           </a:xfrm>
           <a:prstGeom prst="ellipse">
@@ -2915,13 +2899,6 @@
             <a:prstDash val="solid"/>
           </a:ln>
         </p:spPr>
-        <p:txBody>
-          <a:bodyPr/>
-          <a:lstStyle/>
-          <a:p>
-            <a:endParaRPr lang="zh-CN" altLang="en-US"/>
-          </a:p>
-        </p:txBody>
       </p:sp>
       <p:sp>
         <p:nvSpPr>
@@ -2944,7 +2921,7 @@
           <a:bodyPr wrap="square" lIns="0" tIns="0" rIns="0" bIns="0" rtlCol="0" anchor="ctr"/>
           <a:lstStyle/>
           <a:p>
-            <a:pPr marL="0" indent="0" algn="ctr">
+            <a:pPr algn="ctr" indent="0" marL="0">
               <a:buNone/>
             </a:pPr>
             <a:r>
@@ -2961,7 +2938,7 @@
             <a:endParaRPr lang="en-US" sz="940" dirty="0"/>
           </a:p>
           <a:p>
-            <a:pPr marL="0" indent="0" algn="ctr">
+            <a:pPr algn="ctr" indent="0" marL="0">
               <a:buNone/>
             </a:pPr>
             <a:r>
@@ -2978,7 +2955,7 @@
             <a:endParaRPr lang="en-US" sz="940" dirty="0"/>
           </a:p>
           <a:p>
-            <a:pPr marL="0" indent="0" algn="ctr">
+            <a:pPr algn="ctr" indent="0" marL="0">
               <a:buNone/>
             </a:pPr>
             <a:r>
@@ -3020,13 +2997,6 @@
             <a:prstDash val="solid"/>
           </a:ln>
         </p:spPr>
-        <p:txBody>
-          <a:bodyPr/>
-          <a:lstStyle/>
-          <a:p>
-            <a:endParaRPr lang="zh-CN" altLang="en-US"/>
-          </a:p>
-        </p:txBody>
       </p:sp>
       <p:sp>
         <p:nvSpPr>
@@ -3052,13 +3022,6 @@
             <a:prstDash val="solid"/>
           </a:ln>
         </p:spPr>
-        <p:txBody>
-          <a:bodyPr/>
-          <a:lstStyle/>
-          <a:p>
-            <a:endParaRPr lang="zh-CN" altLang="en-US"/>
-          </a:p>
-        </p:txBody>
       </p:sp>
       <p:sp>
         <p:nvSpPr>
@@ -3081,7 +3044,7 @@
           <a:bodyPr wrap="square" lIns="0" tIns="0" rIns="0" bIns="0" rtlCol="0" anchor="ctr"/>
           <a:lstStyle/>
           <a:p>
-            <a:pPr marL="0" indent="0" algn="ctr">
+            <a:pPr algn="ctr" indent="0" marL="0">
               <a:buNone/>
             </a:pPr>
             <a:r>
@@ -3098,7 +3061,7 @@
             <a:endParaRPr lang="en-US" sz="1050" dirty="0"/>
           </a:p>
           <a:p>
-            <a:pPr marL="0" indent="0" algn="ctr">
+            <a:pPr algn="ctr" indent="0" marL="0">
               <a:buNone/>
             </a:pPr>
             <a:r>
@@ -3124,7 +3087,7 @@
         </p:nvSpPr>
         <p:spPr>
           <a:xfrm>
-            <a:off x="14527073" y="5222595"/>
+            <a:off x="14527073" y="5237683"/>
             <a:ext cx="1719986" cy="669341"/>
           </a:xfrm>
           <a:prstGeom prst="roundRect">
@@ -3142,13 +3105,6 @@
             <a:prstDash val="solid"/>
           </a:ln>
         </p:spPr>
-        <p:txBody>
-          <a:bodyPr/>
-          <a:lstStyle/>
-          <a:p>
-            <a:endParaRPr lang="zh-CN" altLang="en-US"/>
-          </a:p>
-        </p:txBody>
       </p:sp>
       <p:sp>
         <p:nvSpPr>
@@ -3174,13 +3130,6 @@
             <a:prstDash val="solid"/>
           </a:ln>
         </p:spPr>
-        <p:txBody>
-          <a:bodyPr/>
-          <a:lstStyle/>
-          <a:p>
-            <a:endParaRPr lang="zh-CN" altLang="en-US"/>
-          </a:p>
-        </p:txBody>
       </p:sp>
       <p:sp>
         <p:nvSpPr>
@@ -3206,13 +3155,6 @@
             <a:prstDash val="solid"/>
           </a:ln>
         </p:spPr>
-        <p:txBody>
-          <a:bodyPr/>
-          <a:lstStyle/>
-          <a:p>
-            <a:endParaRPr lang="zh-CN" altLang="en-US"/>
-          </a:p>
-        </p:txBody>
       </p:sp>
       <p:sp>
         <p:nvSpPr>
@@ -3238,13 +3180,6 @@
             <a:prstDash val="solid"/>
           </a:ln>
         </p:spPr>
-        <p:txBody>
-          <a:bodyPr/>
-          <a:lstStyle/>
-          <a:p>
-            <a:endParaRPr lang="zh-CN" altLang="en-US"/>
-          </a:p>
-        </p:txBody>
       </p:sp>
       <p:sp>
         <p:nvSpPr>
@@ -3270,13 +3205,6 @@
             <a:prstDash val="solid"/>
           </a:ln>
         </p:spPr>
-        <p:txBody>
-          <a:bodyPr/>
-          <a:lstStyle/>
-          <a:p>
-            <a:endParaRPr lang="zh-CN" altLang="en-US"/>
-          </a:p>
-        </p:txBody>
       </p:sp>
       <p:sp>
         <p:nvSpPr>
@@ -3302,13 +3230,6 @@
             <a:prstDash val="solid"/>
           </a:ln>
         </p:spPr>
-        <p:txBody>
-          <a:bodyPr/>
-          <a:lstStyle/>
-          <a:p>
-            <a:endParaRPr lang="zh-CN" altLang="en-US"/>
-          </a:p>
-        </p:txBody>
       </p:sp>
       <p:sp>
         <p:nvSpPr>
@@ -3334,13 +3255,6 @@
             <a:prstDash val="solid"/>
           </a:ln>
         </p:spPr>
-        <p:txBody>
-          <a:bodyPr/>
-          <a:lstStyle/>
-          <a:p>
-            <a:endParaRPr lang="zh-CN" altLang="en-US"/>
-          </a:p>
-        </p:txBody>
       </p:sp>
       <p:sp>
         <p:nvSpPr>
@@ -3366,13 +3280,6 @@
             <a:prstDash val="solid"/>
           </a:ln>
         </p:spPr>
-        <p:txBody>
-          <a:bodyPr/>
-          <a:lstStyle/>
-          <a:p>
-            <a:endParaRPr lang="zh-CN" altLang="en-US"/>
-          </a:p>
-        </p:txBody>
       </p:sp>
       <p:sp>
         <p:nvSpPr>
@@ -3396,13 +3303,6 @@
             <a:prstDash val="solid"/>
           </a:ln>
         </p:spPr>
-        <p:txBody>
-          <a:bodyPr/>
-          <a:lstStyle/>
-          <a:p>
-            <a:endParaRPr lang="zh-CN" altLang="en-US"/>
-          </a:p>
-        </p:txBody>
       </p:sp>
       <p:sp>
         <p:nvSpPr>
@@ -3426,13 +3326,6 @@
             <a:prstDash val="solid"/>
           </a:ln>
         </p:spPr>
-        <p:txBody>
-          <a:bodyPr/>
-          <a:lstStyle/>
-          <a:p>
-            <a:endParaRPr lang="zh-CN" altLang="en-US"/>
-          </a:p>
-        </p:txBody>
       </p:sp>
       <p:sp>
         <p:nvSpPr>
@@ -3458,13 +3351,6 @@
             <a:prstDash val="solid"/>
           </a:ln>
         </p:spPr>
-        <p:txBody>
-          <a:bodyPr/>
-          <a:lstStyle/>
-          <a:p>
-            <a:endParaRPr lang="zh-CN" altLang="en-US"/>
-          </a:p>
-        </p:txBody>
       </p:sp>
       <p:sp>
         <p:nvSpPr>
@@ -3487,7 +3373,7 @@
           <a:bodyPr wrap="square" lIns="0" tIns="0" rIns="0" bIns="0" rtlCol="0" anchor="ctr"/>
           <a:lstStyle/>
           <a:p>
-            <a:pPr marL="0" indent="0" algn="ctr">
+            <a:pPr algn="ctr" indent="0" marL="0">
               <a:buNone/>
             </a:pPr>
             <a:r>
@@ -3529,13 +3415,6 @@
             <a:prstDash val="solid"/>
           </a:ln>
         </p:spPr>
-        <p:txBody>
-          <a:bodyPr/>
-          <a:lstStyle/>
-          <a:p>
-            <a:endParaRPr lang="zh-CN" altLang="en-US"/>
-          </a:p>
-        </p:txBody>
       </p:sp>
       <p:sp>
         <p:nvSpPr>
@@ -3558,7 +3437,7 @@
           <a:bodyPr wrap="square" lIns="0" tIns="0" rIns="0" bIns="0" rtlCol="0" anchor="ctr"/>
           <a:lstStyle/>
           <a:p>
-            <a:pPr marL="0" indent="0" algn="ctr">
+            <a:pPr algn="ctr" indent="0" marL="0">
               <a:buNone/>
             </a:pPr>
             <a:r>
@@ -3600,13 +3479,6 @@
             <a:prstDash val="solid"/>
           </a:ln>
         </p:spPr>
-        <p:txBody>
-          <a:bodyPr/>
-          <a:lstStyle/>
-          <a:p>
-            <a:endParaRPr lang="zh-CN" altLang="en-US"/>
-          </a:p>
-        </p:txBody>
       </p:sp>
       <p:sp>
         <p:nvSpPr>
@@ -3629,7 +3501,7 @@
           <a:bodyPr wrap="square" lIns="0" tIns="0" rIns="0" bIns="0" rtlCol="0" anchor="ctr"/>
           <a:lstStyle/>
           <a:p>
-            <a:pPr marL="0" indent="0" algn="ctr">
+            <a:pPr algn="ctr" indent="0" marL="0">
               <a:buNone/>
             </a:pPr>
             <a:r>
@@ -3671,13 +3543,6 @@
             <a:prstDash val="solid"/>
           </a:ln>
         </p:spPr>
-        <p:txBody>
-          <a:bodyPr/>
-          <a:lstStyle/>
-          <a:p>
-            <a:endParaRPr lang="zh-CN" altLang="en-US"/>
-          </a:p>
-        </p:txBody>
       </p:sp>
       <p:sp>
         <p:nvSpPr>
@@ -3700,7 +3565,7 @@
           <a:bodyPr wrap="square" lIns="0" tIns="0" rIns="0" bIns="0" rtlCol="0" anchor="ctr"/>
           <a:lstStyle/>
           <a:p>
-            <a:pPr marL="0" indent="0" algn="ctr">
+            <a:pPr algn="ctr" indent="0" marL="0">
               <a:buNone/>
             </a:pPr>
             <a:r>
@@ -3742,13 +3607,6 @@
             <a:prstDash val="solid"/>
           </a:ln>
         </p:spPr>
-        <p:txBody>
-          <a:bodyPr/>
-          <a:lstStyle/>
-          <a:p>
-            <a:endParaRPr lang="zh-CN" altLang="en-US"/>
-          </a:p>
-        </p:txBody>
       </p:sp>
       <p:sp>
         <p:nvSpPr>
@@ -3771,7 +3629,7 @@
           <a:bodyPr wrap="square" lIns="0" tIns="0" rIns="0" bIns="0" rtlCol="0" anchor="ctr"/>
           <a:lstStyle/>
           <a:p>
-            <a:pPr marL="0" indent="0" algn="ctr">
+            <a:pPr algn="ctr" indent="0" marL="0">
               <a:buNone/>
             </a:pPr>
             <a:r>
@@ -3810,7 +3668,7 @@
           <a:bodyPr wrap="square" lIns="0" tIns="0" rIns="0" bIns="0" rtlCol="0" anchor="ctr"/>
           <a:lstStyle/>
           <a:p>
-            <a:pPr marL="0" indent="0" algn="l">
+            <a:pPr algn="l" indent="0" marL="0">
               <a:buNone/>
             </a:pPr>
             <a:r>
@@ -3849,7 +3707,7 @@
           <a:bodyPr wrap="square" lIns="0" tIns="0" rIns="0" bIns="0" rtlCol="0" anchor="ctr"/>
           <a:lstStyle/>
           <a:p>
-            <a:pPr marL="0" indent="0" algn="ctr">
+            <a:pPr algn="ctr" indent="0" marL="0">
               <a:buNone/>
             </a:pPr>
             <a:r>
@@ -3891,13 +3749,6 @@
             <a:prstDash val="solid"/>
           </a:ln>
         </p:spPr>
-        <p:txBody>
-          <a:bodyPr/>
-          <a:lstStyle/>
-          <a:p>
-            <a:endParaRPr lang="zh-CN" altLang="en-US"/>
-          </a:p>
-        </p:txBody>
       </p:sp>
       <p:sp>
         <p:nvSpPr>
@@ -3923,13 +3774,6 @@
             <a:prstDash val="solid"/>
           </a:ln>
         </p:spPr>
-        <p:txBody>
-          <a:bodyPr/>
-          <a:lstStyle/>
-          <a:p>
-            <a:endParaRPr lang="zh-CN" altLang="en-US"/>
-          </a:p>
-        </p:txBody>
       </p:sp>
       <p:sp>
         <p:nvSpPr>
@@ -3952,7 +3796,7 @@
           <a:bodyPr wrap="square" lIns="0" tIns="0" rIns="0" bIns="0" rtlCol="0" anchor="ctr"/>
           <a:lstStyle/>
           <a:p>
-            <a:pPr marL="0" indent="0" algn="ctr">
+            <a:pPr algn="ctr" indent="0" marL="0">
               <a:buNone/>
             </a:pPr>
             <a:r>
@@ -3994,13 +3838,6 @@
             <a:prstDash val="solid"/>
           </a:ln>
         </p:spPr>
-        <p:txBody>
-          <a:bodyPr/>
-          <a:lstStyle/>
-          <a:p>
-            <a:endParaRPr lang="zh-CN" altLang="en-US"/>
-          </a:p>
-        </p:txBody>
       </p:sp>
       <p:sp>
         <p:nvSpPr>
@@ -4026,13 +3863,6 @@
             <a:prstDash val="solid"/>
           </a:ln>
         </p:spPr>
-        <p:txBody>
-          <a:bodyPr/>
-          <a:lstStyle/>
-          <a:p>
-            <a:endParaRPr lang="zh-CN" altLang="en-US"/>
-          </a:p>
-        </p:txBody>
       </p:sp>
       <p:sp>
         <p:nvSpPr>
@@ -4055,7 +3885,7 @@
           <a:bodyPr wrap="square" lIns="0" tIns="0" rIns="0" bIns="0" rtlCol="0" anchor="ctr"/>
           <a:lstStyle/>
           <a:p>
-            <a:pPr marL="0" indent="0" algn="ctr">
+            <a:pPr algn="ctr" indent="0" marL="0">
               <a:buNone/>
             </a:pPr>
             <a:r>
@@ -4072,7 +3902,7 @@
             <a:endParaRPr lang="en-US" sz="790" dirty="0"/>
           </a:p>
           <a:p>
-            <a:pPr marL="0" indent="0" algn="ctr">
+            <a:pPr algn="ctr" indent="0" marL="0">
               <a:buNone/>
             </a:pPr>
             <a:r>
@@ -4089,7 +3919,7 @@
             <a:endParaRPr lang="en-US" sz="790" dirty="0"/>
           </a:p>
           <a:p>
-            <a:pPr marL="0" indent="0" algn="ctr">
+            <a:pPr algn="ctr" indent="0" marL="0">
               <a:buNone/>
             </a:pPr>
             <a:r>
@@ -4106,7 +3936,7 @@
             <a:endParaRPr lang="en-US" sz="790" dirty="0"/>
           </a:p>
           <a:p>
-            <a:pPr marL="0" indent="0" algn="ctr">
+            <a:pPr algn="ctr" indent="0" marL="0">
               <a:buNone/>
             </a:pPr>
             <a:r>
@@ -4150,13 +3980,6 @@
             <a:prstDash val="solid"/>
           </a:ln>
         </p:spPr>
-        <p:txBody>
-          <a:bodyPr/>
-          <a:lstStyle/>
-          <a:p>
-            <a:endParaRPr lang="zh-CN" altLang="en-US"/>
-          </a:p>
-        </p:txBody>
       </p:sp>
       <p:sp>
         <p:nvSpPr>
@@ -4179,7 +4002,7 @@
           <a:bodyPr wrap="square" lIns="0" tIns="0" rIns="0" bIns="0" rtlCol="0" anchor="ctr"/>
           <a:lstStyle/>
           <a:p>
-            <a:pPr marL="0" indent="0" algn="ctr">
+            <a:pPr algn="ctr" indent="0" marL="0">
               <a:buNone/>
             </a:pPr>
             <a:r>
@@ -4196,7 +4019,7 @@
             <a:endParaRPr lang="en-US" sz="940" dirty="0"/>
           </a:p>
           <a:p>
-            <a:pPr marL="0" indent="0" algn="ctr">
+            <a:pPr algn="ctr" indent="0" marL="0">
               <a:buNone/>
             </a:pPr>
             <a:r>
@@ -4213,7 +4036,7 @@
             <a:endParaRPr lang="en-US" sz="940" dirty="0"/>
           </a:p>
           <a:p>
-            <a:pPr marL="0" indent="0" algn="ctr">
+            <a:pPr algn="ctr" indent="0" marL="0">
               <a:buNone/>
             </a:pPr>
             <a:r>
@@ -4230,7 +4053,7 @@
             <a:endParaRPr lang="en-US" sz="940" dirty="0"/>
           </a:p>
           <a:p>
-            <a:pPr marL="0" indent="0" algn="ctr">
+            <a:pPr algn="ctr" indent="0" marL="0">
               <a:buNone/>
             </a:pPr>
             <a:r>
@@ -4276,13 +4099,6 @@
             <a:prstDash val="dash"/>
           </a:ln>
         </p:spPr>
-        <p:txBody>
-          <a:bodyPr/>
-          <a:lstStyle/>
-          <a:p>
-            <a:endParaRPr lang="zh-CN" altLang="en-US"/>
-          </a:p>
-        </p:txBody>
       </p:sp>
       <p:sp>
         <p:nvSpPr>
@@ -4305,7 +4121,7 @@
           <a:bodyPr wrap="square" lIns="0" tIns="0" rIns="0" bIns="0" rtlCol="0" anchor="ctr"/>
           <a:lstStyle/>
           <a:p>
-            <a:pPr marL="0" indent="0" algn="ctr">
+            <a:pPr algn="ctr" indent="0" marL="0">
               <a:buNone/>
             </a:pPr>
             <a:r>
@@ -4322,7 +4138,7 @@
             <a:endParaRPr lang="en-US" sz="940" dirty="0"/>
           </a:p>
           <a:p>
-            <a:pPr marL="0" indent="0" algn="ctr">
+            <a:pPr algn="ctr" indent="0" marL="0">
               <a:buNone/>
             </a:pPr>
             <a:r>
@@ -4339,7 +4155,7 @@
             <a:endParaRPr lang="en-US" sz="940" dirty="0"/>
           </a:p>
           <a:p>
-            <a:pPr marL="0" indent="0" algn="ctr">
+            <a:pPr algn="ctr" indent="0" marL="0">
               <a:buNone/>
             </a:pPr>
             <a:r>
@@ -4378,7 +4194,7 @@
           <a:bodyPr wrap="square" lIns="0" tIns="0" rIns="0" bIns="0" rtlCol="0" anchor="ctr"/>
           <a:lstStyle/>
           <a:p>
-            <a:pPr marL="0" indent="0" algn="ctr">
+            <a:pPr algn="ctr" indent="0" marL="0">
               <a:buNone/>
             </a:pPr>
             <a:r>
@@ -4404,7 +4220,7 @@
         </p:nvSpPr>
         <p:spPr>
           <a:xfrm>
-            <a:off x="5351983" y="4510735"/>
+            <a:off x="5351983" y="4491533"/>
             <a:ext cx="8219542" cy="4014216"/>
           </a:xfrm>
           <a:prstGeom prst="rect">
@@ -4422,13 +4238,6 @@
             <a:prstDash val="dash"/>
           </a:ln>
         </p:spPr>
-        <p:txBody>
-          <a:bodyPr/>
-          <a:lstStyle/>
-          <a:p>
-            <a:endParaRPr lang="zh-CN" altLang="en-US"/>
-          </a:p>
-        </p:txBody>
       </p:sp>
       <p:sp>
         <p:nvSpPr>
@@ -4454,13 +4263,6 @@
             <a:prstDash val="solid"/>
           </a:ln>
         </p:spPr>
-        <p:txBody>
-          <a:bodyPr/>
-          <a:lstStyle/>
-          <a:p>
-            <a:endParaRPr lang="zh-CN" altLang="en-US"/>
-          </a:p>
-        </p:txBody>
       </p:sp>
       <p:sp>
         <p:nvSpPr>
@@ -4483,7 +4285,7 @@
           <a:bodyPr wrap="square" lIns="0" tIns="0" rIns="0" bIns="0" rtlCol="0" anchor="ctr"/>
           <a:lstStyle/>
           <a:p>
-            <a:pPr marL="0" indent="0" algn="ctr">
+            <a:pPr algn="ctr" indent="0" marL="0">
               <a:buNone/>
             </a:pPr>
             <a:r>
@@ -4495,12 +4297,12 @@
                 <a:ea typeface="Arial" pitchFamily="34" charset="-122"/>
                 <a:cs typeface="Arial" pitchFamily="34" charset="-120"/>
               </a:rPr>
-              <a:t>Rich Fragmentation (Easy to Sequence)</a:t>
+              <a:t>Rich Fragmentation (Higher Coverage Propensity)</a:t>
             </a:r>
             <a:endParaRPr lang="en-US" sz="1020" dirty="0"/>
           </a:p>
           <a:p>
-            <a:pPr marL="0" indent="0" algn="ctr">
+            <a:pPr algn="ctr" indent="0" marL="0">
               <a:buNone/>
             </a:pPr>
             <a:r>
@@ -4512,12 +4314,12 @@
                 <a:ea typeface="Arial" pitchFamily="34" charset="-122"/>
                 <a:cs typeface="Arial" pitchFamily="34" charset="-120"/>
               </a:rPr>
-              <a:t>More cleavage sites, stronger signals,</a:t>
+              <a:t>More predicted cleavage sites,</a:t>
             </a:r>
             <a:endParaRPr lang="en-US" sz="1020" dirty="0"/>
           </a:p>
           <a:p>
-            <a:pPr marL="0" indent="0" algn="ctr">
+            <a:pPr algn="ctr" indent="0" marL="0">
               <a:buNone/>
             </a:pPr>
             <a:r>
@@ -4529,7 +4331,7 @@
                 <a:ea typeface="Arial" pitchFamily="34" charset="-122"/>
                 <a:cs typeface="Arial" pitchFamily="34" charset="-120"/>
               </a:rPr>
-              <a:t>better sequence coverage</a:t>
+              <a:t>more potential fragment information</a:t>
             </a:r>
             <a:endParaRPr lang="en-US" sz="1020" dirty="0"/>
           </a:p>
@@ -4543,7 +4345,7 @@
         </p:nvSpPr>
         <p:spPr>
           <a:xfrm>
-            <a:off x="5543093" y="5304435"/>
+            <a:off x="5543093" y="5304434"/>
             <a:ext cx="3918204" cy="3010205"/>
           </a:xfrm>
           <a:prstGeom prst="rect">
@@ -4559,13 +4361,6 @@
             <a:prstDash val="solid"/>
           </a:ln>
         </p:spPr>
-        <p:txBody>
-          <a:bodyPr/>
-          <a:lstStyle/>
-          <a:p>
-            <a:endParaRPr lang="zh-CN" altLang="en-US"/>
-          </a:p>
-        </p:txBody>
       </p:sp>
       <p:sp>
         <p:nvSpPr>
@@ -4575,8 +4370,8 @@
         </p:nvSpPr>
         <p:spPr>
           <a:xfrm>
-            <a:off x="6222492" y="5524804"/>
-            <a:ext cx="305410" cy="114746"/>
+            <a:off x="5676595" y="5523890"/>
+            <a:ext cx="305410" cy="152705"/>
           </a:xfrm>
           <a:prstGeom prst="rect">
             <a:avLst/>
@@ -4588,7 +4383,7 @@
           <a:bodyPr wrap="square" lIns="0" tIns="0" rIns="0" bIns="0" rtlCol="0" anchor="ctr"/>
           <a:lstStyle/>
           <a:p>
-            <a:pPr marL="0" indent="0" algn="l">
+            <a:pPr algn="l" indent="0" marL="0">
               <a:buNone/>
             </a:pPr>
             <a:r>
@@ -4614,7 +4409,7 @@
         </p:nvSpPr>
         <p:spPr>
           <a:xfrm>
-            <a:off x="6421373" y="5582412"/>
+            <a:off x="5972861" y="5600700"/>
             <a:ext cx="2275027" cy="0"/>
           </a:xfrm>
           <a:prstGeom prst="line">
@@ -4628,13 +4423,6 @@
             <a:prstDash val="solid"/>
           </a:ln>
         </p:spPr>
-        <p:txBody>
-          <a:bodyPr/>
-          <a:lstStyle/>
-          <a:p>
-            <a:endParaRPr lang="zh-CN" altLang="en-US"/>
-          </a:p>
-        </p:txBody>
       </p:sp>
       <p:sp>
         <p:nvSpPr>
@@ -4644,7 +4432,7 @@
         </p:nvSpPr>
         <p:spPr>
           <a:xfrm>
-            <a:off x="6421373" y="5478706"/>
+            <a:off x="5886907" y="5371186"/>
             <a:ext cx="229514" cy="229514"/>
           </a:xfrm>
           <a:prstGeom prst="ellipse">
@@ -4660,13 +4448,6 @@
             <a:prstDash val="solid"/>
           </a:ln>
         </p:spPr>
-        <p:txBody>
-          <a:bodyPr/>
-          <a:lstStyle/>
-          <a:p>
-            <a:endParaRPr lang="zh-CN" altLang="en-US"/>
-          </a:p>
-        </p:txBody>
       </p:sp>
       <p:sp>
         <p:nvSpPr>
@@ -4676,7 +4457,7 @@
         </p:nvSpPr>
         <p:spPr>
           <a:xfrm>
-            <a:off x="6421373" y="5467655"/>
+            <a:off x="6002122" y="5485486"/>
             <a:ext cx="229514" cy="229514"/>
           </a:xfrm>
           <a:prstGeom prst="rect">
@@ -4689,7 +4470,7 @@
           <a:bodyPr wrap="square" lIns="0" tIns="0" rIns="0" bIns="0" rtlCol="0" anchor="ctr"/>
           <a:lstStyle/>
           <a:p>
-            <a:pPr marL="0" indent="0" algn="ctr">
+            <a:pPr algn="ctr" indent="0" marL="0">
               <a:buNone/>
             </a:pPr>
             <a:r>
@@ -4715,7 +4496,7 @@
         </p:nvSpPr>
         <p:spPr>
           <a:xfrm>
-            <a:off x="6717638" y="5478706"/>
+            <a:off x="6174029" y="5371186"/>
             <a:ext cx="229514" cy="229514"/>
           </a:xfrm>
           <a:prstGeom prst="ellipse">
@@ -4731,13 +4512,6 @@
             <a:prstDash val="solid"/>
           </a:ln>
         </p:spPr>
-        <p:txBody>
-          <a:bodyPr/>
-          <a:lstStyle/>
-          <a:p>
-            <a:endParaRPr lang="zh-CN" altLang="en-US"/>
-          </a:p>
-        </p:txBody>
       </p:sp>
       <p:sp>
         <p:nvSpPr>
@@ -4747,7 +4521,7 @@
         </p:nvSpPr>
         <p:spPr>
           <a:xfrm>
-            <a:off x="6736841" y="5467198"/>
+            <a:off x="6288329" y="5485486"/>
             <a:ext cx="229514" cy="229514"/>
           </a:xfrm>
           <a:prstGeom prst="rect">
@@ -4760,7 +4534,7 @@
           <a:bodyPr wrap="square" lIns="0" tIns="0" rIns="0" bIns="0" rtlCol="0" anchor="ctr"/>
           <a:lstStyle/>
           <a:p>
-            <a:pPr marL="0" indent="0" algn="ctr">
+            <a:pPr algn="ctr" indent="0" marL="0">
               <a:buNone/>
             </a:pPr>
             <a:r>
@@ -4786,7 +4560,7 @@
         </p:nvSpPr>
         <p:spPr>
           <a:xfrm>
-            <a:off x="7001276" y="5466225"/>
+            <a:off x="6461150" y="5371186"/>
             <a:ext cx="229514" cy="229514"/>
           </a:xfrm>
           <a:prstGeom prst="ellipse">
@@ -4802,13 +4576,6 @@
             <a:prstDash val="solid"/>
           </a:ln>
         </p:spPr>
-        <p:txBody>
-          <a:bodyPr/>
-          <a:lstStyle/>
-          <a:p>
-            <a:endParaRPr lang="zh-CN" altLang="en-US"/>
-          </a:p>
-        </p:txBody>
       </p:sp>
       <p:sp>
         <p:nvSpPr>
@@ -4818,7 +4585,7 @@
         </p:nvSpPr>
         <p:spPr>
           <a:xfrm>
-            <a:off x="7023962" y="5467198"/>
+            <a:off x="6575450" y="5485486"/>
             <a:ext cx="229514" cy="229514"/>
           </a:xfrm>
           <a:prstGeom prst="rect">
@@ -4831,7 +4598,7 @@
           <a:bodyPr wrap="square" lIns="0" tIns="0" rIns="0" bIns="0" rtlCol="0" anchor="ctr"/>
           <a:lstStyle/>
           <a:p>
-            <a:pPr marL="0" indent="0" algn="ctr">
+            <a:pPr algn="ctr" indent="0" marL="0">
               <a:buNone/>
             </a:pPr>
             <a:r>
@@ -4857,7 +4624,7 @@
         </p:nvSpPr>
         <p:spPr>
           <a:xfrm>
-            <a:off x="7290968" y="5467655"/>
+            <a:off x="6747358" y="5371186"/>
             <a:ext cx="229514" cy="229514"/>
           </a:xfrm>
           <a:prstGeom prst="ellipse">
@@ -4873,13 +4640,6 @@
             <a:prstDash val="solid"/>
           </a:ln>
         </p:spPr>
-        <p:txBody>
-          <a:bodyPr/>
-          <a:lstStyle/>
-          <a:p>
-            <a:endParaRPr lang="zh-CN" altLang="en-US"/>
-          </a:p>
-        </p:txBody>
       </p:sp>
       <p:sp>
         <p:nvSpPr>
@@ -4889,7 +4649,7 @@
         </p:nvSpPr>
         <p:spPr>
           <a:xfrm>
-            <a:off x="7311084" y="5467198"/>
+            <a:off x="6862572" y="5485486"/>
             <a:ext cx="229514" cy="229514"/>
           </a:xfrm>
           <a:prstGeom prst="rect">
@@ -4902,7 +4662,7 @@
           <a:bodyPr wrap="square" lIns="0" tIns="0" rIns="0" bIns="0" rtlCol="0" anchor="ctr"/>
           <a:lstStyle/>
           <a:p>
-            <a:pPr marL="0" indent="0" algn="ctr">
+            <a:pPr algn="ctr" indent="0" marL="0">
               <a:buNone/>
             </a:pPr>
             <a:r>
@@ -4928,7 +4688,7 @@
         </p:nvSpPr>
         <p:spPr>
           <a:xfrm>
-            <a:off x="7568945" y="5457596"/>
+            <a:off x="7034479" y="5371186"/>
             <a:ext cx="229514" cy="229514"/>
           </a:xfrm>
           <a:prstGeom prst="ellipse">
@@ -4944,13 +4704,6 @@
             <a:prstDash val="solid"/>
           </a:ln>
         </p:spPr>
-        <p:txBody>
-          <a:bodyPr/>
-          <a:lstStyle/>
-          <a:p>
-            <a:endParaRPr lang="zh-CN" altLang="en-US"/>
-          </a:p>
-        </p:txBody>
       </p:sp>
       <p:sp>
         <p:nvSpPr>
@@ -4960,7 +4713,7 @@
         </p:nvSpPr>
         <p:spPr>
           <a:xfrm>
-            <a:off x="7569403" y="5460771"/>
+            <a:off x="7148779" y="5485486"/>
             <a:ext cx="229514" cy="229514"/>
           </a:xfrm>
           <a:prstGeom prst="rect">
@@ -4973,7 +4726,7 @@
           <a:bodyPr wrap="square" lIns="0" tIns="0" rIns="0" bIns="0" rtlCol="0" anchor="ctr"/>
           <a:lstStyle/>
           <a:p>
-            <a:pPr marL="0" indent="0" algn="ctr">
+            <a:pPr algn="ctr" indent="0" marL="0">
               <a:buNone/>
             </a:pPr>
             <a:r>
@@ -4999,7 +4752,7 @@
         </p:nvSpPr>
         <p:spPr>
           <a:xfrm>
-            <a:off x="7855566" y="5457596"/>
+            <a:off x="7320686" y="5371186"/>
             <a:ext cx="229514" cy="229514"/>
           </a:xfrm>
           <a:prstGeom prst="ellipse">
@@ -5015,13 +4768,6 @@
             <a:prstDash val="solid"/>
           </a:ln>
         </p:spPr>
-        <p:txBody>
-          <a:bodyPr/>
-          <a:lstStyle/>
-          <a:p>
-            <a:endParaRPr lang="zh-CN" altLang="en-US"/>
-          </a:p>
-        </p:txBody>
       </p:sp>
       <p:sp>
         <p:nvSpPr>
@@ -5031,7 +4777,7 @@
         </p:nvSpPr>
         <p:spPr>
           <a:xfrm>
-            <a:off x="7856068" y="5467198"/>
+            <a:off x="7435901" y="5485486"/>
             <a:ext cx="229514" cy="229514"/>
           </a:xfrm>
           <a:prstGeom prst="rect">
@@ -5044,7 +4790,7 @@
           <a:bodyPr wrap="square" lIns="0" tIns="0" rIns="0" bIns="0" rtlCol="0" anchor="ctr"/>
           <a:lstStyle/>
           <a:p>
-            <a:pPr marL="0" indent="0" algn="ctr">
+            <a:pPr algn="ctr" indent="0" marL="0">
               <a:buNone/>
             </a:pPr>
             <a:r>
@@ -5070,7 +4816,7 @@
         </p:nvSpPr>
         <p:spPr>
           <a:xfrm>
-            <a:off x="8160433" y="5467655"/>
+            <a:off x="7607808" y="5371186"/>
             <a:ext cx="229514" cy="229514"/>
           </a:xfrm>
           <a:prstGeom prst="ellipse">
@@ -5086,13 +4832,6 @@
             <a:prstDash val="solid"/>
           </a:ln>
         </p:spPr>
-        <p:txBody>
-          <a:bodyPr/>
-          <a:lstStyle/>
-          <a:p>
-            <a:endParaRPr lang="zh-CN" altLang="en-US"/>
-          </a:p>
-        </p:txBody>
       </p:sp>
       <p:sp>
         <p:nvSpPr>
@@ -5102,7 +4841,7 @@
         </p:nvSpPr>
         <p:spPr>
           <a:xfrm>
-            <a:off x="8170620" y="5467198"/>
+            <a:off x="7722108" y="5485486"/>
             <a:ext cx="229514" cy="229514"/>
           </a:xfrm>
           <a:prstGeom prst="rect">
@@ -5115,7 +4854,7 @@
           <a:bodyPr wrap="square" lIns="0" tIns="0" rIns="0" bIns="0" rtlCol="0" anchor="ctr"/>
           <a:lstStyle/>
           <a:p>
-            <a:pPr marL="0" indent="0" algn="ctr">
+            <a:pPr algn="ctr" indent="0" marL="0">
               <a:buNone/>
             </a:pPr>
             <a:r>
@@ -5141,7 +4880,7 @@
         </p:nvSpPr>
         <p:spPr>
           <a:xfrm>
-            <a:off x="8458199" y="5466225"/>
+            <a:off x="7894015" y="5371186"/>
             <a:ext cx="229514" cy="229514"/>
           </a:xfrm>
           <a:prstGeom prst="ellipse">
@@ -5157,13 +4896,6 @@
             <a:prstDash val="solid"/>
           </a:ln>
         </p:spPr>
-        <p:txBody>
-          <a:bodyPr/>
-          <a:lstStyle/>
-          <a:p>
-            <a:endParaRPr lang="zh-CN" altLang="en-US"/>
-          </a:p>
-        </p:txBody>
       </p:sp>
       <p:sp>
         <p:nvSpPr>
@@ -5173,7 +4905,7 @@
         </p:nvSpPr>
         <p:spPr>
           <a:xfrm>
-            <a:off x="8457742" y="5467198"/>
+            <a:off x="8009230" y="5485486"/>
             <a:ext cx="229514" cy="229514"/>
           </a:xfrm>
           <a:prstGeom prst="rect">
@@ -5186,7 +4918,7 @@
           <a:bodyPr wrap="square" lIns="0" tIns="0" rIns="0" bIns="0" rtlCol="0" anchor="ctr"/>
           <a:lstStyle/>
           <a:p>
-            <a:pPr marL="0" indent="0" algn="ctr">
+            <a:pPr algn="ctr" indent="0" marL="0">
               <a:buNone/>
             </a:pPr>
             <a:r>
@@ -5212,7 +4944,7 @@
         </p:nvSpPr>
         <p:spPr>
           <a:xfrm>
-            <a:off x="6680606" y="5447995"/>
+            <a:off x="6259982" y="5447995"/>
             <a:ext cx="0" cy="305410"/>
           </a:xfrm>
           <a:prstGeom prst="line">
@@ -5226,13 +4958,6 @@
             <a:prstDash val="dash"/>
           </a:ln>
         </p:spPr>
-        <p:txBody>
-          <a:bodyPr/>
-          <a:lstStyle/>
-          <a:p>
-            <a:endParaRPr lang="zh-CN" altLang="en-US"/>
-          </a:p>
-        </p:txBody>
       </p:sp>
       <p:sp>
         <p:nvSpPr>
@@ -5242,7 +4967,7 @@
         </p:nvSpPr>
         <p:spPr>
           <a:xfrm>
-            <a:off x="6976872" y="5460771"/>
+            <a:off x="6547104" y="5447995"/>
             <a:ext cx="0" cy="305410"/>
           </a:xfrm>
           <a:prstGeom prst="line">
@@ -5256,13 +4981,6 @@
             <a:prstDash val="dash"/>
           </a:ln>
         </p:spPr>
-        <p:txBody>
-          <a:bodyPr/>
-          <a:lstStyle/>
-          <a:p>
-            <a:endParaRPr lang="zh-CN" altLang="en-US"/>
-          </a:p>
-        </p:txBody>
       </p:sp>
       <p:sp>
         <p:nvSpPr>
@@ -5272,7 +4990,7 @@
         </p:nvSpPr>
         <p:spPr>
           <a:xfrm>
-            <a:off x="7540598" y="5460771"/>
+            <a:off x="7120433" y="5447995"/>
             <a:ext cx="0" cy="305410"/>
           </a:xfrm>
           <a:prstGeom prst="line">
@@ -5286,13 +5004,6 @@
             <a:prstDash val="dash"/>
           </a:ln>
         </p:spPr>
-        <p:txBody>
-          <a:bodyPr/>
-          <a:lstStyle/>
-          <a:p>
-            <a:endParaRPr lang="zh-CN" altLang="en-US"/>
-          </a:p>
-        </p:txBody>
       </p:sp>
       <p:sp>
         <p:nvSpPr>
@@ -5302,7 +5013,7 @@
         </p:nvSpPr>
         <p:spPr>
           <a:xfrm>
-            <a:off x="8137375" y="5431435"/>
+            <a:off x="7693762" y="5447995"/>
             <a:ext cx="0" cy="305410"/>
           </a:xfrm>
           <a:prstGeom prst="line">
@@ -5316,13 +5027,6 @@
             <a:prstDash val="dash"/>
           </a:ln>
         </p:spPr>
-        <p:txBody>
-          <a:bodyPr/>
-          <a:lstStyle/>
-          <a:p>
-            <a:endParaRPr lang="zh-CN" altLang="en-US"/>
-          </a:p>
-        </p:txBody>
       </p:sp>
       <p:sp>
         <p:nvSpPr>
@@ -5332,7 +5036,7 @@
         </p:nvSpPr>
         <p:spPr>
           <a:xfrm>
-            <a:off x="8696400" y="5511648"/>
+            <a:off x="8104327" y="5523890"/>
             <a:ext cx="573329" cy="152705"/>
           </a:xfrm>
           <a:prstGeom prst="rect">
@@ -5345,7 +5049,7 @@
           <a:bodyPr wrap="square" lIns="0" tIns="0" rIns="0" bIns="0" rtlCol="0" anchor="ctr"/>
           <a:lstStyle/>
           <a:p>
-            <a:pPr marL="0" indent="0" algn="l">
+            <a:pPr algn="l" indent="0" marL="0">
               <a:buNone/>
             </a:pPr>
             <a:r>
@@ -5384,7 +5088,7 @@
           <a:bodyPr wrap="square" lIns="0" tIns="0" rIns="0" bIns="0" rtlCol="0" anchor="ctr"/>
           <a:lstStyle/>
           <a:p>
-            <a:pPr marL="0" indent="0" algn="ctr">
+            <a:pPr algn="ctr" indent="0" marL="0">
               <a:buNone/>
             </a:pPr>
             <a:r>
@@ -5424,13 +5128,6 @@
             <a:prstDash val="solid"/>
           </a:ln>
         </p:spPr>
-        <p:txBody>
-          <a:bodyPr/>
-          <a:lstStyle/>
-          <a:p>
-            <a:endParaRPr lang="zh-CN" altLang="en-US"/>
-          </a:p>
-        </p:txBody>
       </p:sp>
       <p:sp>
         <p:nvSpPr>
@@ -5454,13 +5151,6 @@
             <a:prstDash val="solid"/>
           </a:ln>
         </p:spPr>
-        <p:txBody>
-          <a:bodyPr/>
-          <a:lstStyle/>
-          <a:p>
-            <a:endParaRPr lang="zh-CN" altLang="en-US"/>
-          </a:p>
-        </p:txBody>
       </p:sp>
       <p:sp>
         <p:nvSpPr>
@@ -5480,10 +5170,10 @@
           <a:ln/>
         </p:spPr>
         <p:txBody>
-          <a:bodyPr vert="vert270" wrap="square" lIns="0" tIns="0" rIns="0" bIns="0" rtlCol="0" anchor="ctr"/>
+          <a:bodyPr wrap="square" lIns="0" tIns="0" rIns="0" bIns="0" rtlCol="0" anchor="ctr" vert="vert270"/>
           <a:lstStyle/>
           <a:p>
-            <a:pPr marL="0" indent="0" algn="ctr">
+            <a:pPr algn="ctr" indent="0" marL="0">
               <a:buNone/>
             </a:pPr>
             <a:r>
@@ -5522,7 +5212,7 @@
           <a:bodyPr wrap="square" lIns="0" tIns="0" rIns="0" bIns="0" rtlCol="0" anchor="ctr"/>
           <a:lstStyle/>
           <a:p>
-            <a:pPr marL="0" indent="0" algn="l">
+            <a:pPr algn="l" indent="0" marL="0">
               <a:buNone/>
             </a:pPr>
             <a:r>
@@ -5564,13 +5254,6 @@
             <a:prstDash val="solid"/>
           </a:ln>
         </p:spPr>
-        <p:txBody>
-          <a:bodyPr/>
-          <a:lstStyle/>
-          <a:p>
-            <a:endParaRPr lang="zh-CN" altLang="en-US"/>
-          </a:p>
-        </p:txBody>
       </p:sp>
       <p:sp>
         <p:nvSpPr>
@@ -5593,7 +5276,7 @@
           <a:bodyPr wrap="square" lIns="0" tIns="0" rIns="0" bIns="0" rtlCol="0" anchor="ctr"/>
           <a:lstStyle/>
           <a:p>
-            <a:pPr marL="0" indent="0" algn="ctr">
+            <a:pPr algn="ctr" indent="0" marL="0">
               <a:buNone/>
             </a:pPr>
             <a:r>
@@ -5635,13 +5318,6 @@
             <a:prstDash val="solid"/>
           </a:ln>
         </p:spPr>
-        <p:txBody>
-          <a:bodyPr/>
-          <a:lstStyle/>
-          <a:p>
-            <a:endParaRPr lang="zh-CN" altLang="en-US"/>
-          </a:p>
-        </p:txBody>
       </p:sp>
       <p:sp>
         <p:nvSpPr>
@@ -5664,7 +5340,7 @@
           <a:bodyPr wrap="square" lIns="0" tIns="0" rIns="0" bIns="0" rtlCol="0" anchor="ctr"/>
           <a:lstStyle/>
           <a:p>
-            <a:pPr marL="0" indent="0" algn="ctr">
+            <a:pPr algn="ctr" indent="0" marL="0">
               <a:buNone/>
             </a:pPr>
             <a:r>
@@ -5706,13 +5382,6 @@
             <a:prstDash val="solid"/>
           </a:ln>
         </p:spPr>
-        <p:txBody>
-          <a:bodyPr/>
-          <a:lstStyle/>
-          <a:p>
-            <a:endParaRPr lang="zh-CN" altLang="en-US"/>
-          </a:p>
-        </p:txBody>
       </p:sp>
       <p:sp>
         <p:nvSpPr>
@@ -5735,7 +5404,7 @@
           <a:bodyPr wrap="square" lIns="0" tIns="0" rIns="0" bIns="0" rtlCol="0" anchor="ctr"/>
           <a:lstStyle/>
           <a:p>
-            <a:pPr marL="0" indent="0" algn="ctr">
+            <a:pPr algn="ctr" indent="0" marL="0">
               <a:buNone/>
             </a:pPr>
             <a:r>
@@ -5777,13 +5446,6 @@
             <a:prstDash val="solid"/>
           </a:ln>
         </p:spPr>
-        <p:txBody>
-          <a:bodyPr/>
-          <a:lstStyle/>
-          <a:p>
-            <a:endParaRPr lang="zh-CN" altLang="en-US"/>
-          </a:p>
-        </p:txBody>
       </p:sp>
       <p:sp>
         <p:nvSpPr>
@@ -5806,7 +5468,7 @@
           <a:bodyPr wrap="square" lIns="0" tIns="0" rIns="0" bIns="0" rtlCol="0" anchor="ctr"/>
           <a:lstStyle/>
           <a:p>
-            <a:pPr marL="0" indent="0" algn="ctr">
+            <a:pPr algn="ctr" indent="0" marL="0">
               <a:buNone/>
             </a:pPr>
             <a:r>
@@ -5848,13 +5510,6 @@
             <a:prstDash val="solid"/>
           </a:ln>
         </p:spPr>
-        <p:txBody>
-          <a:bodyPr/>
-          <a:lstStyle/>
-          <a:p>
-            <a:endParaRPr lang="zh-CN" altLang="en-US"/>
-          </a:p>
-        </p:txBody>
       </p:sp>
       <p:sp>
         <p:nvSpPr>
@@ -5877,7 +5532,7 @@
           <a:bodyPr wrap="square" lIns="0" tIns="0" rIns="0" bIns="0" rtlCol="0" anchor="ctr"/>
           <a:lstStyle/>
           <a:p>
-            <a:pPr marL="0" indent="0" algn="ctr">
+            <a:pPr algn="ctr" indent="0" marL="0">
               <a:buNone/>
             </a:pPr>
             <a:r>
@@ -5919,13 +5574,6 @@
             <a:prstDash val="solid"/>
           </a:ln>
         </p:spPr>
-        <p:txBody>
-          <a:bodyPr/>
-          <a:lstStyle/>
-          <a:p>
-            <a:endParaRPr lang="zh-CN" altLang="en-US"/>
-          </a:p>
-        </p:txBody>
       </p:sp>
       <p:sp>
         <p:nvSpPr>
@@ -5948,7 +5596,7 @@
           <a:bodyPr wrap="square" lIns="0" tIns="0" rIns="0" bIns="0" rtlCol="0" anchor="ctr"/>
           <a:lstStyle/>
           <a:p>
-            <a:pPr marL="0" indent="0" algn="ctr">
+            <a:pPr algn="ctr" indent="0" marL="0">
               <a:buNone/>
             </a:pPr>
             <a:r>
@@ -5990,13 +5638,6 @@
             <a:prstDash val="solid"/>
           </a:ln>
         </p:spPr>
-        <p:txBody>
-          <a:bodyPr/>
-          <a:lstStyle/>
-          <a:p>
-            <a:endParaRPr lang="zh-CN" altLang="en-US"/>
-          </a:p>
-        </p:txBody>
       </p:sp>
       <p:sp>
         <p:nvSpPr>
@@ -6019,7 +5660,7 @@
           <a:bodyPr wrap="square" lIns="0" tIns="0" rIns="0" bIns="0" rtlCol="0" anchor="ctr"/>
           <a:lstStyle/>
           <a:p>
-            <a:pPr marL="0" indent="0" algn="ctr">
+            <a:pPr algn="ctr" indent="0" marL="0">
               <a:buNone/>
             </a:pPr>
             <a:r>
@@ -6061,13 +5702,6 @@
             <a:prstDash val="solid"/>
           </a:ln>
         </p:spPr>
-        <p:txBody>
-          <a:bodyPr/>
-          <a:lstStyle/>
-          <a:p>
-            <a:endParaRPr lang="zh-CN" altLang="en-US"/>
-          </a:p>
-        </p:txBody>
       </p:sp>
       <p:sp>
         <p:nvSpPr>
@@ -6090,7 +5724,7 @@
           <a:bodyPr wrap="square" lIns="0" tIns="0" rIns="0" bIns="0" rtlCol="0" anchor="ctr"/>
           <a:lstStyle/>
           <a:p>
-            <a:pPr marL="0" indent="0" algn="ctr">
+            <a:pPr algn="ctr" indent="0" marL="0">
               <a:buNone/>
             </a:pPr>
             <a:r>
@@ -6132,13 +5766,6 @@
             <a:prstDash val="solid"/>
           </a:ln>
         </p:spPr>
-        <p:txBody>
-          <a:bodyPr/>
-          <a:lstStyle/>
-          <a:p>
-            <a:endParaRPr lang="zh-CN" altLang="en-US"/>
-          </a:p>
-        </p:txBody>
       </p:sp>
       <p:sp>
         <p:nvSpPr>
@@ -6161,7 +5788,7 @@
           <a:bodyPr wrap="square" lIns="0" tIns="0" rIns="0" bIns="0" rtlCol="0" anchor="ctr"/>
           <a:lstStyle/>
           <a:p>
-            <a:pPr marL="0" indent="0" algn="ctr">
+            <a:pPr algn="ctr" indent="0" marL="0">
               <a:buNone/>
             </a:pPr>
             <a:r>
@@ -6203,13 +5830,6 @@
             <a:prstDash val="solid"/>
           </a:ln>
         </p:spPr>
-        <p:txBody>
-          <a:bodyPr/>
-          <a:lstStyle/>
-          <a:p>
-            <a:endParaRPr lang="zh-CN" altLang="en-US"/>
-          </a:p>
-        </p:txBody>
       </p:sp>
       <p:sp>
         <p:nvSpPr>
@@ -6232,7 +5852,7 @@
           <a:bodyPr wrap="square" lIns="0" tIns="0" rIns="0" bIns="0" rtlCol="0" anchor="ctr"/>
           <a:lstStyle/>
           <a:p>
-            <a:pPr marL="0" indent="0" algn="ctr">
+            <a:pPr algn="ctr" indent="0" marL="0">
               <a:buNone/>
             </a:pPr>
             <a:r>
@@ -6274,13 +5894,6 @@
             <a:prstDash val="solid"/>
           </a:ln>
         </p:spPr>
-        <p:txBody>
-          <a:bodyPr/>
-          <a:lstStyle/>
-          <a:p>
-            <a:endParaRPr lang="zh-CN" altLang="en-US"/>
-          </a:p>
-        </p:txBody>
       </p:sp>
       <p:sp>
         <p:nvSpPr>
@@ -6303,7 +5916,7 @@
           <a:bodyPr wrap="square" lIns="0" tIns="0" rIns="0" bIns="0" rtlCol="0" anchor="ctr"/>
           <a:lstStyle/>
           <a:p>
-            <a:pPr marL="0" indent="0" algn="ctr">
+            <a:pPr algn="ctr" indent="0" marL="0">
               <a:buNone/>
             </a:pPr>
             <a:r>
@@ -6345,13 +5958,6 @@
             <a:prstDash val="solid"/>
           </a:ln>
         </p:spPr>
-        <p:txBody>
-          <a:bodyPr/>
-          <a:lstStyle/>
-          <a:p>
-            <a:endParaRPr lang="zh-CN" altLang="en-US"/>
-          </a:p>
-        </p:txBody>
       </p:sp>
       <p:sp>
         <p:nvSpPr>
@@ -6374,7 +5980,7 @@
           <a:bodyPr wrap="square" lIns="0" tIns="0" rIns="0" bIns="0" rtlCol="0" anchor="ctr"/>
           <a:lstStyle/>
           <a:p>
-            <a:pPr marL="0" indent="0" algn="ctr">
+            <a:pPr algn="ctr" indent="0" marL="0">
               <a:buNone/>
             </a:pPr>
             <a:r>
@@ -6413,7 +6019,7 @@
           <a:bodyPr wrap="square" lIns="0" tIns="0" rIns="0" bIns="0" rtlCol="0" anchor="ctr"/>
           <a:lstStyle/>
           <a:p>
-            <a:pPr marL="0" indent="0" algn="ctr">
+            <a:pPr algn="ctr" indent="0" marL="0">
               <a:buNone/>
             </a:pPr>
             <a:r>
@@ -6425,12 +6031,12 @@
                 <a:ea typeface="Arial" pitchFamily="34" charset="-122"/>
                 <a:cs typeface="Arial" pitchFamily="34" charset="-120"/>
               </a:rPr>
-              <a:t>High signal, high coverage,</a:t>
+              <a:t>More potential fragment information,</a:t>
             </a:r>
             <a:endParaRPr lang="en-US" sz="980" dirty="0"/>
           </a:p>
           <a:p>
-            <a:pPr marL="0" indent="0" algn="ctr">
+            <a:pPr algn="ctr" indent="0" marL="0">
               <a:buNone/>
             </a:pPr>
             <a:r>
@@ -6442,7 +6048,7 @@
                 <a:ea typeface="Arial" pitchFamily="34" charset="-122"/>
                 <a:cs typeface="Arial" pitchFamily="34" charset="-120"/>
               </a:rPr>
-              <a:t>easy to sequence ✅</a:t>
+              <a:t>higher coverage propensity ✅</a:t>
             </a:r>
             <a:endParaRPr lang="en-US" sz="980" dirty="0"/>
           </a:p>
@@ -6472,13 +6078,6 @@
             <a:prstDash val="solid"/>
           </a:ln>
         </p:spPr>
-        <p:txBody>
-          <a:bodyPr/>
-          <a:lstStyle/>
-          <a:p>
-            <a:endParaRPr lang="zh-CN" altLang="en-US"/>
-          </a:p>
-        </p:txBody>
       </p:sp>
       <p:sp>
         <p:nvSpPr>
@@ -6501,7 +6100,7 @@
           <a:bodyPr wrap="square" lIns="0" tIns="0" rIns="0" bIns="0" rtlCol="0" anchor="ctr"/>
           <a:lstStyle/>
           <a:p>
-            <a:pPr marL="0" indent="0" algn="ctr">
+            <a:pPr algn="ctr" indent="0" marL="0">
               <a:buNone/>
             </a:pPr>
             <a:r>
@@ -6513,12 +6112,12 @@
                 <a:ea typeface="Arial" pitchFamily="34" charset="-122"/>
                 <a:cs typeface="Arial" pitchFamily="34" charset="-120"/>
               </a:rPr>
-              <a:t>Sparse Fragmentation (Hard to Sequence)</a:t>
+              <a:t>Sparse Fragmentation (Lower Coverage Propensity)</a:t>
             </a:r>
             <a:endParaRPr lang="en-US" sz="1020" dirty="0"/>
           </a:p>
           <a:p>
-            <a:pPr marL="0" indent="0" algn="ctr">
+            <a:pPr algn="ctr" indent="0" marL="0">
               <a:buNone/>
             </a:pPr>
             <a:r>
@@ -6530,12 +6129,12 @@
                 <a:ea typeface="Arial" pitchFamily="34" charset="-122"/>
                 <a:cs typeface="Arial" pitchFamily="34" charset="-120"/>
               </a:rPr>
-              <a:t>Fewer cleavage sites, weaker signals,</a:t>
+              <a:t>Fewer predicted cleavage sites,</a:t>
             </a:r>
             <a:endParaRPr lang="en-US" sz="1020" dirty="0"/>
           </a:p>
           <a:p>
-            <a:pPr marL="0" indent="0" algn="ctr">
+            <a:pPr algn="ctr" indent="0" marL="0">
               <a:buNone/>
             </a:pPr>
             <a:r>
@@ -6547,7 +6146,7 @@
                 <a:ea typeface="Arial" pitchFamily="34" charset="-122"/>
                 <a:cs typeface="Arial" pitchFamily="34" charset="-120"/>
               </a:rPr>
-              <a:t>poor sequence coverage</a:t>
+              <a:t>less potential fragment information</a:t>
             </a:r>
             <a:endParaRPr lang="en-US" sz="1020" dirty="0"/>
           </a:p>
@@ -6561,7 +6160,7 @@
         </p:nvSpPr>
         <p:spPr>
           <a:xfrm>
-            <a:off x="9671609" y="5280659"/>
+            <a:off x="9652406" y="5304434"/>
             <a:ext cx="3727094" cy="3010205"/>
           </a:xfrm>
           <a:prstGeom prst="rect">
@@ -6577,13 +6176,6 @@
             <a:prstDash val="solid"/>
           </a:ln>
         </p:spPr>
-        <p:txBody>
-          <a:bodyPr/>
-          <a:lstStyle/>
-          <a:p>
-            <a:endParaRPr lang="zh-CN" altLang="en-US"/>
-          </a:p>
-        </p:txBody>
       </p:sp>
       <p:sp>
         <p:nvSpPr>
@@ -6593,7 +6185,7 @@
         </p:nvSpPr>
         <p:spPr>
           <a:xfrm>
-            <a:off x="10340950" y="5550052"/>
+            <a:off x="9786823" y="5523890"/>
             <a:ext cx="305410" cy="152705"/>
           </a:xfrm>
           <a:prstGeom prst="rect">
@@ -6606,7 +6198,7 @@
           <a:bodyPr wrap="square" lIns="0" tIns="0" rIns="0" bIns="0" rtlCol="0" anchor="ctr"/>
           <a:lstStyle/>
           <a:p>
-            <a:pPr marL="0" indent="0" algn="l">
+            <a:pPr algn="l" indent="0" marL="0">
               <a:buNone/>
             </a:pPr>
             <a:r>
@@ -6632,7 +6224,7 @@
         </p:nvSpPr>
         <p:spPr>
           <a:xfrm>
-            <a:off x="10637216" y="5626862"/>
+            <a:off x="10083089" y="5600700"/>
             <a:ext cx="1987906" cy="0"/>
           </a:xfrm>
           <a:prstGeom prst="line">
@@ -6646,13 +6238,6 @@
             <a:prstDash val="solid"/>
           </a:ln>
         </p:spPr>
-        <p:txBody>
-          <a:bodyPr/>
-          <a:lstStyle/>
-          <a:p>
-            <a:endParaRPr lang="zh-CN" altLang="en-US"/>
-          </a:p>
-        </p:txBody>
       </p:sp>
       <p:sp>
         <p:nvSpPr>
@@ -6662,7 +6247,7 @@
         </p:nvSpPr>
         <p:spPr>
           <a:xfrm>
-            <a:off x="10498345" y="5522079"/>
+            <a:off x="9997135" y="5371186"/>
             <a:ext cx="229514" cy="229514"/>
           </a:xfrm>
           <a:prstGeom prst="ellipse">
@@ -6678,13 +6263,6 @@
             <a:prstDash val="solid"/>
           </a:ln>
         </p:spPr>
-        <p:txBody>
-          <a:bodyPr/>
-          <a:lstStyle/>
-          <a:p>
-            <a:endParaRPr lang="zh-CN" altLang="en-US"/>
-          </a:p>
-        </p:txBody>
       </p:sp>
       <p:sp>
         <p:nvSpPr>
@@ -6694,7 +6272,7 @@
         </p:nvSpPr>
         <p:spPr>
           <a:xfrm>
-            <a:off x="10522459" y="5505603"/>
+            <a:off x="10111435" y="5485486"/>
             <a:ext cx="229514" cy="229514"/>
           </a:xfrm>
           <a:prstGeom prst="rect">
@@ -6707,7 +6285,7 @@
           <a:bodyPr wrap="square" lIns="0" tIns="0" rIns="0" bIns="0" rtlCol="0" anchor="ctr"/>
           <a:lstStyle/>
           <a:p>
-            <a:pPr marL="0" indent="0" algn="ctr">
+            <a:pPr algn="ctr" indent="0" marL="0">
               <a:buNone/>
             </a:pPr>
             <a:r>
@@ -6733,8 +6311,8 @@
         </p:nvSpPr>
         <p:spPr>
           <a:xfrm>
-            <a:off x="10838382" y="5522079"/>
-            <a:ext cx="247803" cy="229514"/>
+            <a:off x="10283342" y="5371186"/>
+            <a:ext cx="229514" cy="229514"/>
           </a:xfrm>
           <a:prstGeom prst="ellipse">
             <a:avLst/>
@@ -6749,13 +6327,6 @@
             <a:prstDash val="solid"/>
           </a:ln>
         </p:spPr>
-        <p:txBody>
-          <a:bodyPr/>
-          <a:lstStyle/>
-          <a:p>
-            <a:endParaRPr lang="zh-CN" altLang="en-US"/>
-          </a:p>
-        </p:txBody>
       </p:sp>
       <p:sp>
         <p:nvSpPr>
@@ -6765,7 +6336,7 @@
         </p:nvSpPr>
         <p:spPr>
           <a:xfrm>
-            <a:off x="10856671" y="5512105"/>
+            <a:off x="10398557" y="5485486"/>
             <a:ext cx="229514" cy="229514"/>
           </a:xfrm>
           <a:prstGeom prst="rect">
@@ -6778,7 +6349,7 @@
           <a:bodyPr wrap="square" lIns="0" tIns="0" rIns="0" bIns="0" rtlCol="0" anchor="ctr"/>
           <a:lstStyle/>
           <a:p>
-            <a:pPr marL="0" indent="0" algn="ctr">
+            <a:pPr algn="ctr" indent="0" marL="0">
               <a:buNone/>
             </a:pPr>
             <a:r>
@@ -6804,7 +6375,7 @@
         </p:nvSpPr>
         <p:spPr>
           <a:xfrm>
-            <a:off x="11191342" y="5524804"/>
+            <a:off x="10570464" y="5371186"/>
             <a:ext cx="229514" cy="229514"/>
           </a:xfrm>
           <a:prstGeom prst="ellipse">
@@ -6820,13 +6391,6 @@
             <a:prstDash val="solid"/>
           </a:ln>
         </p:spPr>
-        <p:txBody>
-          <a:bodyPr/>
-          <a:lstStyle/>
-          <a:p>
-            <a:endParaRPr lang="zh-CN" altLang="en-US"/>
-          </a:p>
-        </p:txBody>
       </p:sp>
       <p:sp>
         <p:nvSpPr>
@@ -6836,7 +6400,7 @@
         </p:nvSpPr>
         <p:spPr>
           <a:xfrm>
-            <a:off x="11195949" y="5522079"/>
+            <a:off x="10684764" y="5485486"/>
             <a:ext cx="229514" cy="229514"/>
           </a:xfrm>
           <a:prstGeom prst="rect">
@@ -6849,7 +6413,7 @@
           <a:bodyPr wrap="square" lIns="0" tIns="0" rIns="0" bIns="0" rtlCol="0" anchor="ctr"/>
           <a:lstStyle/>
           <a:p>
-            <a:pPr marL="0" indent="0" algn="ctr">
+            <a:pPr algn="ctr" indent="0" marL="0">
               <a:buNone/>
             </a:pPr>
             <a:r>
@@ -6875,7 +6439,7 @@
         </p:nvSpPr>
         <p:spPr>
           <a:xfrm>
-            <a:off x="11508859" y="5528981"/>
+            <a:off x="10856671" y="5371186"/>
             <a:ext cx="229514" cy="229514"/>
           </a:xfrm>
           <a:prstGeom prst="ellipse">
@@ -6891,13 +6455,6 @@
             <a:prstDash val="solid"/>
           </a:ln>
         </p:spPr>
-        <p:txBody>
-          <a:bodyPr/>
-          <a:lstStyle/>
-          <a:p>
-            <a:endParaRPr lang="zh-CN" altLang="en-US"/>
-          </a:p>
-        </p:txBody>
       </p:sp>
       <p:sp>
         <p:nvSpPr>
@@ -6907,7 +6464,7 @@
         </p:nvSpPr>
         <p:spPr>
           <a:xfrm>
-            <a:off x="11526013" y="5511648"/>
+            <a:off x="10971886" y="5485486"/>
             <a:ext cx="229514" cy="229514"/>
           </a:xfrm>
           <a:prstGeom prst="rect">
@@ -6920,7 +6477,7 @@
           <a:bodyPr wrap="square" lIns="0" tIns="0" rIns="0" bIns="0" rtlCol="0" anchor="ctr"/>
           <a:lstStyle/>
           <a:p>
-            <a:pPr marL="0" indent="0" algn="ctr">
+            <a:pPr algn="ctr" indent="0" marL="0">
               <a:buNone/>
             </a:pPr>
             <a:r>
@@ -6946,7 +6503,7 @@
         </p:nvSpPr>
         <p:spPr>
           <a:xfrm>
-            <a:off x="11780470" y="5511648"/>
+            <a:off x="11143793" y="5371186"/>
             <a:ext cx="229514" cy="229514"/>
           </a:xfrm>
           <a:prstGeom prst="ellipse">
@@ -6962,13 +6519,6 @@
             <a:prstDash val="solid"/>
           </a:ln>
         </p:spPr>
-        <p:txBody>
-          <a:bodyPr/>
-          <a:lstStyle/>
-          <a:p>
-            <a:endParaRPr lang="zh-CN" altLang="en-US"/>
-          </a:p>
-        </p:txBody>
       </p:sp>
       <p:sp>
         <p:nvSpPr>
@@ -6978,7 +6528,7 @@
         </p:nvSpPr>
         <p:spPr>
           <a:xfrm>
-            <a:off x="11812220" y="5511648"/>
+            <a:off x="11258093" y="5485486"/>
             <a:ext cx="229514" cy="229514"/>
           </a:xfrm>
           <a:prstGeom prst="rect">
@@ -6991,7 +6541,7 @@
           <a:bodyPr wrap="square" lIns="0" tIns="0" rIns="0" bIns="0" rtlCol="0" anchor="ctr"/>
           <a:lstStyle/>
           <a:p>
-            <a:pPr marL="0" indent="0" algn="ctr">
+            <a:pPr algn="ctr" indent="0" marL="0">
               <a:buNone/>
             </a:pPr>
             <a:r>
@@ -7017,7 +6567,7 @@
         </p:nvSpPr>
         <p:spPr>
           <a:xfrm>
-            <a:off x="12109400" y="5511648"/>
+            <a:off x="11430914" y="5371186"/>
             <a:ext cx="229514" cy="229514"/>
           </a:xfrm>
           <a:prstGeom prst="ellipse">
@@ -7033,13 +6583,6 @@
             <a:prstDash val="solid"/>
           </a:ln>
         </p:spPr>
-        <p:txBody>
-          <a:bodyPr/>
-          <a:lstStyle/>
-          <a:p>
-            <a:endParaRPr lang="zh-CN" altLang="en-US"/>
-          </a:p>
-        </p:txBody>
       </p:sp>
       <p:sp>
         <p:nvSpPr>
@@ -7049,7 +6592,7 @@
         </p:nvSpPr>
         <p:spPr>
           <a:xfrm>
-            <a:off x="12099341" y="5511648"/>
+            <a:off x="11545214" y="5485486"/>
             <a:ext cx="229514" cy="229514"/>
           </a:xfrm>
           <a:prstGeom prst="rect">
@@ -7062,7 +6605,7 @@
           <a:bodyPr wrap="square" lIns="0" tIns="0" rIns="0" bIns="0" rtlCol="0" anchor="ctr"/>
           <a:lstStyle/>
           <a:p>
-            <a:pPr marL="0" indent="0" algn="ctr">
+            <a:pPr algn="ctr" indent="0" marL="0">
               <a:buNone/>
             </a:pPr>
             <a:r>
@@ -7088,7 +6631,7 @@
         </p:nvSpPr>
         <p:spPr>
           <a:xfrm>
-            <a:off x="12386006" y="5533644"/>
+            <a:off x="11717122" y="5371186"/>
             <a:ext cx="229514" cy="229514"/>
           </a:xfrm>
           <a:prstGeom prst="ellipse">
@@ -7104,13 +6647,6 @@
             <a:prstDash val="solid"/>
           </a:ln>
         </p:spPr>
-        <p:txBody>
-          <a:bodyPr/>
-          <a:lstStyle/>
-          <a:p>
-            <a:endParaRPr lang="zh-CN" altLang="en-US"/>
-          </a:p>
-        </p:txBody>
       </p:sp>
       <p:sp>
         <p:nvSpPr>
@@ -7120,7 +6656,7 @@
         </p:nvSpPr>
         <p:spPr>
           <a:xfrm>
-            <a:off x="12386463" y="5511648"/>
+            <a:off x="11832336" y="5485486"/>
             <a:ext cx="229514" cy="229514"/>
           </a:xfrm>
           <a:prstGeom prst="rect">
@@ -7133,7 +6669,7 @@
           <a:bodyPr wrap="square" lIns="0" tIns="0" rIns="0" bIns="0" rtlCol="0" anchor="ctr"/>
           <a:lstStyle/>
           <a:p>
-            <a:pPr marL="0" indent="0" algn="ctr">
+            <a:pPr algn="ctr" indent="0" marL="0">
               <a:buNone/>
             </a:pPr>
             <a:r>
@@ -7159,7 +6695,7 @@
         </p:nvSpPr>
         <p:spPr>
           <a:xfrm>
-            <a:off x="11151125" y="5478542"/>
+            <a:off x="10637215" y="5447995"/>
             <a:ext cx="0" cy="305410"/>
           </a:xfrm>
           <a:prstGeom prst="line">
@@ -7173,13 +6709,6 @@
             <a:prstDash val="dash"/>
           </a:ln>
         </p:spPr>
-        <p:txBody>
-          <a:bodyPr/>
-          <a:lstStyle/>
-          <a:p>
-            <a:endParaRPr lang="zh-CN" altLang="en-US"/>
-          </a:p>
-        </p:txBody>
       </p:sp>
       <p:sp>
         <p:nvSpPr>
@@ -7189,7 +6718,7 @@
         </p:nvSpPr>
         <p:spPr>
           <a:xfrm>
-            <a:off x="12051793" y="5474157"/>
+            <a:off x="11497666" y="5447995"/>
             <a:ext cx="0" cy="305410"/>
           </a:xfrm>
           <a:prstGeom prst="line">
@@ -7203,13 +6732,6 @@
             <a:prstDash val="dash"/>
           </a:ln>
         </p:spPr>
-        <p:txBody>
-          <a:bodyPr/>
-          <a:lstStyle/>
-          <a:p>
-            <a:endParaRPr lang="zh-CN" altLang="en-US"/>
-          </a:p>
-        </p:txBody>
       </p:sp>
       <p:sp>
         <p:nvSpPr>
@@ -7219,7 +6741,7 @@
         </p:nvSpPr>
         <p:spPr>
           <a:xfrm>
-            <a:off x="12615520" y="5550509"/>
+            <a:off x="11965838" y="5523890"/>
             <a:ext cx="573329" cy="152705"/>
           </a:xfrm>
           <a:prstGeom prst="rect">
@@ -7232,7 +6754,7 @@
           <a:bodyPr wrap="square" lIns="0" tIns="0" rIns="0" bIns="0" rtlCol="0" anchor="ctr"/>
           <a:lstStyle/>
           <a:p>
-            <a:pPr marL="0" indent="0" algn="l">
+            <a:pPr algn="l" indent="0" marL="0">
               <a:buNone/>
             </a:pPr>
             <a:r>
@@ -7271,7 +6793,7 @@
           <a:bodyPr wrap="square" lIns="0" tIns="0" rIns="0" bIns="0" rtlCol="0" anchor="ctr"/>
           <a:lstStyle/>
           <a:p>
-            <a:pPr marL="0" indent="0" algn="ctr">
+            <a:pPr algn="ctr" indent="0" marL="0">
               <a:buNone/>
             </a:pPr>
             <a:r>
@@ -7311,13 +6833,6 @@
             <a:prstDash val="solid"/>
           </a:ln>
         </p:spPr>
-        <p:txBody>
-          <a:bodyPr/>
-          <a:lstStyle/>
-          <a:p>
-            <a:endParaRPr lang="zh-CN" altLang="en-US"/>
-          </a:p>
-        </p:txBody>
       </p:sp>
       <p:sp>
         <p:nvSpPr>
@@ -7341,13 +6856,6 @@
             <a:prstDash val="solid"/>
           </a:ln>
         </p:spPr>
-        <p:txBody>
-          <a:bodyPr/>
-          <a:lstStyle/>
-          <a:p>
-            <a:endParaRPr lang="zh-CN" altLang="en-US"/>
-          </a:p>
-        </p:txBody>
       </p:sp>
       <p:sp>
         <p:nvSpPr>
@@ -7367,10 +6875,10 @@
           <a:ln/>
         </p:spPr>
         <p:txBody>
-          <a:bodyPr vert="vert270" wrap="square" lIns="0" tIns="0" rIns="0" bIns="0" rtlCol="0" anchor="ctr"/>
+          <a:bodyPr wrap="square" lIns="0" tIns="0" rIns="0" bIns="0" rtlCol="0" anchor="ctr" vert="vert270"/>
           <a:lstStyle/>
           <a:p>
-            <a:pPr marL="0" indent="0" algn="ctr">
+            <a:pPr algn="ctr" indent="0" marL="0">
               <a:buNone/>
             </a:pPr>
             <a:r>
@@ -7409,7 +6917,7 @@
           <a:bodyPr wrap="square" lIns="0" tIns="0" rIns="0" bIns="0" rtlCol="0" anchor="ctr"/>
           <a:lstStyle/>
           <a:p>
-            <a:pPr marL="0" indent="0" algn="l">
+            <a:pPr algn="l" indent="0" marL="0">
               <a:buNone/>
             </a:pPr>
             <a:r>
@@ -7451,13 +6959,6 @@
             <a:prstDash val="solid"/>
           </a:ln>
         </p:spPr>
-        <p:txBody>
-          <a:bodyPr/>
-          <a:lstStyle/>
-          <a:p>
-            <a:endParaRPr lang="zh-CN" altLang="en-US"/>
-          </a:p>
-        </p:txBody>
       </p:sp>
       <p:sp>
         <p:nvSpPr>
@@ -7480,7 +6981,7 @@
           <a:bodyPr wrap="square" lIns="0" tIns="0" rIns="0" bIns="0" rtlCol="0" anchor="ctr"/>
           <a:lstStyle/>
           <a:p>
-            <a:pPr marL="0" indent="0" algn="ctr">
+            <a:pPr algn="ctr" indent="0" marL="0">
               <a:buNone/>
             </a:pPr>
             <a:r>
@@ -7522,13 +7023,6 @@
             <a:prstDash val="solid"/>
           </a:ln>
         </p:spPr>
-        <p:txBody>
-          <a:bodyPr/>
-          <a:lstStyle/>
-          <a:p>
-            <a:endParaRPr lang="zh-CN" altLang="en-US"/>
-          </a:p>
-        </p:txBody>
       </p:sp>
       <p:sp>
         <p:nvSpPr>
@@ -7551,7 +7045,7 @@
           <a:bodyPr wrap="square" lIns="0" tIns="0" rIns="0" bIns="0" rtlCol="0" anchor="ctr"/>
           <a:lstStyle/>
           <a:p>
-            <a:pPr marL="0" indent="0" algn="ctr">
+            <a:pPr algn="ctr" indent="0" marL="0">
               <a:buNone/>
             </a:pPr>
             <a:r>
@@ -7593,13 +7087,6 @@
             <a:prstDash val="solid"/>
           </a:ln>
         </p:spPr>
-        <p:txBody>
-          <a:bodyPr/>
-          <a:lstStyle/>
-          <a:p>
-            <a:endParaRPr lang="zh-CN" altLang="en-US"/>
-          </a:p>
-        </p:txBody>
       </p:sp>
       <p:sp>
         <p:nvSpPr>
@@ -7622,7 +7109,7 @@
           <a:bodyPr wrap="square" lIns="0" tIns="0" rIns="0" bIns="0" rtlCol="0" anchor="ctr"/>
           <a:lstStyle/>
           <a:p>
-            <a:pPr marL="0" indent="0" algn="ctr">
+            <a:pPr algn="ctr" indent="0" marL="0">
               <a:buNone/>
             </a:pPr>
             <a:r>
@@ -7664,13 +7151,6 @@
             <a:prstDash val="solid"/>
           </a:ln>
         </p:spPr>
-        <p:txBody>
-          <a:bodyPr/>
-          <a:lstStyle/>
-          <a:p>
-            <a:endParaRPr lang="zh-CN" altLang="en-US"/>
-          </a:p>
-        </p:txBody>
       </p:sp>
       <p:sp>
         <p:nvSpPr>
@@ -7693,7 +7173,7 @@
           <a:bodyPr wrap="square" lIns="0" tIns="0" rIns="0" bIns="0" rtlCol="0" anchor="ctr"/>
           <a:lstStyle/>
           <a:p>
-            <a:pPr marL="0" indent="0" algn="ctr">
+            <a:pPr algn="ctr" indent="0" marL="0">
               <a:buNone/>
             </a:pPr>
             <a:r>
@@ -7732,7 +7212,7 @@
           <a:bodyPr wrap="square" lIns="0" tIns="0" rIns="0" bIns="0" rtlCol="0" anchor="ctr"/>
           <a:lstStyle/>
           <a:p>
-            <a:pPr marL="0" indent="0" algn="ctr">
+            <a:pPr algn="ctr" indent="0" marL="0">
               <a:buNone/>
             </a:pPr>
             <a:r>
@@ -7744,12 +7224,12 @@
                 <a:ea typeface="Arial" pitchFamily="34" charset="-122"/>
                 <a:cs typeface="Arial" pitchFamily="34" charset="-120"/>
               </a:rPr>
-              <a:t>Low signal, low coverage,</a:t>
+              <a:t>Less potential fragment information,</a:t>
             </a:r>
             <a:endParaRPr lang="en-US" sz="980" dirty="0"/>
           </a:p>
           <a:p>
-            <a:pPr marL="0" indent="0" algn="ctr">
+            <a:pPr algn="ctr" indent="0" marL="0">
               <a:buNone/>
             </a:pPr>
             <a:r>
@@ -7761,7 +7241,7 @@
                 <a:ea typeface="Arial" pitchFamily="34" charset="-122"/>
                 <a:cs typeface="Arial" pitchFamily="34" charset="-120"/>
               </a:rPr>
-              <a:t>difficult to sequence ❌</a:t>
+              <a:t>lower coverage propensity ❌</a:t>
             </a:r>
             <a:endParaRPr lang="en-US" sz="980" dirty="0"/>
           </a:p>
@@ -7789,13 +7269,6 @@
             <a:prstDash val="dash"/>
           </a:ln>
         </p:spPr>
-        <p:txBody>
-          <a:bodyPr/>
-          <a:lstStyle/>
-          <a:p>
-            <a:endParaRPr lang="zh-CN" altLang="en-US"/>
-          </a:p>
-        </p:txBody>
       </p:sp>
       <p:sp>
         <p:nvSpPr>
@@ -7819,13 +7292,6 @@
             <a:prstDash val="dash"/>
           </a:ln>
         </p:spPr>
-        <p:txBody>
-          <a:bodyPr/>
-          <a:lstStyle/>
-          <a:p>
-            <a:endParaRPr lang="zh-CN" altLang="en-US"/>
-          </a:p>
-        </p:txBody>
       </p:sp>
       <p:sp>
         <p:nvSpPr>
@@ -7850,13 +7316,6 @@
             <a:tailEnd type="triangle"/>
           </a:ln>
         </p:spPr>
-        <p:txBody>
-          <a:bodyPr/>
-          <a:lstStyle/>
-          <a:p>
-            <a:endParaRPr lang="zh-CN" altLang="en-US"/>
-          </a:p>
-        </p:txBody>
       </p:sp>
       <p:sp>
         <p:nvSpPr>
@@ -7881,13 +7340,6 @@
             <a:tailEnd type="triangle"/>
           </a:ln>
         </p:spPr>
-        <p:txBody>
-          <a:bodyPr/>
-          <a:lstStyle/>
-          <a:p>
-            <a:endParaRPr lang="zh-CN" altLang="en-US"/>
-          </a:p>
-        </p:txBody>
       </p:sp>
       <p:sp>
         <p:nvSpPr>
@@ -7912,13 +7364,6 @@
             <a:tailEnd type="triangle"/>
           </a:ln>
         </p:spPr>
-        <p:txBody>
-          <a:bodyPr/>
-          <a:lstStyle/>
-          <a:p>
-            <a:endParaRPr lang="zh-CN" altLang="en-US"/>
-          </a:p>
-        </p:txBody>
       </p:sp>
       <p:sp>
         <p:nvSpPr>
@@ -7943,13 +7388,6 @@
             <a:tailEnd type="triangle"/>
           </a:ln>
         </p:spPr>
-        <p:txBody>
-          <a:bodyPr/>
-          <a:lstStyle/>
-          <a:p>
-            <a:endParaRPr lang="zh-CN" altLang="en-US"/>
-          </a:p>
-        </p:txBody>
       </p:sp>
       <p:sp>
         <p:nvSpPr>
@@ -7974,13 +7412,6 @@
             <a:tailEnd type="triangle"/>
           </a:ln>
         </p:spPr>
-        <p:txBody>
-          <a:bodyPr/>
-          <a:lstStyle/>
-          <a:p>
-            <a:endParaRPr lang="zh-CN" altLang="en-US"/>
-          </a:p>
-        </p:txBody>
       </p:sp>
       <p:sp>
         <p:nvSpPr>
@@ -8005,13 +7436,6 @@
             <a:tailEnd type="triangle"/>
           </a:ln>
         </p:spPr>
-        <p:txBody>
-          <a:bodyPr/>
-          <a:lstStyle/>
-          <a:p>
-            <a:endParaRPr lang="zh-CN" altLang="en-US"/>
-          </a:p>
-        </p:txBody>
       </p:sp>
       <p:sp>
         <p:nvSpPr>
@@ -8036,13 +7460,6 @@
             <a:tailEnd type="triangle"/>
           </a:ln>
         </p:spPr>
-        <p:txBody>
-          <a:bodyPr/>
-          <a:lstStyle/>
-          <a:p>
-            <a:endParaRPr lang="zh-CN" altLang="en-US"/>
-          </a:p>
-        </p:txBody>
       </p:sp>
       <p:sp>
         <p:nvSpPr>
@@ -8067,13 +7484,6 @@
             <a:tailEnd type="triangle"/>
           </a:ln>
         </p:spPr>
-        <p:txBody>
-          <a:bodyPr/>
-          <a:lstStyle/>
-          <a:p>
-            <a:endParaRPr lang="zh-CN" altLang="en-US"/>
-          </a:p>
-        </p:txBody>
       </p:sp>
       <p:sp>
         <p:nvSpPr>
@@ -8098,13 +7508,6 @@
             <a:tailEnd type="triangle"/>
           </a:ln>
         </p:spPr>
-        <p:txBody>
-          <a:bodyPr/>
-          <a:lstStyle/>
-          <a:p>
-            <a:endParaRPr lang="zh-CN" altLang="en-US"/>
-          </a:p>
-        </p:txBody>
       </p:sp>
       <p:sp>
         <p:nvSpPr>
@@ -8129,50 +7532,7 @@
             <a:tailEnd type="triangle"/>
           </a:ln>
         </p:spPr>
-        <p:txBody>
-          <a:bodyPr/>
-          <a:lstStyle/>
-          <a:p>
-            <a:endParaRPr lang="zh-CN" altLang="en-US"/>
-          </a:p>
-        </p:txBody>
-      </p:sp>
-      <p:pic>
-        <p:nvPicPr>
-          <p:cNvPr id="199" name="图形 198">
-            <a:extLst>
-              <a:ext uri="{FF2B5EF4-FFF2-40B4-BE49-F238E27FC236}">
-                <a16:creationId xmlns:a16="http://schemas.microsoft.com/office/drawing/2014/main" id="{F3444CFC-CDED-5E9F-7105-C13F84D71D6C}"/>
-              </a:ext>
-            </a:extLst>
-          </p:cNvPr>
-          <p:cNvPicPr>
-            <a:picLocks noChangeAspect="1"/>
-          </p:cNvPicPr>
-          <p:nvPr/>
-        </p:nvPicPr>
-        <p:blipFill>
-          <a:blip>
-            <a:extLst>
-              <a:ext uri="{96DAC541-7B7A-43D3-8B79-37D633B846F1}">
-                <asvg:svgBlip xmlns:asvg="http://schemas.microsoft.com/office/drawing/2016/SVG/main" r:embed="rId3"/>
-              </a:ext>
-            </a:extLst>
-          </a:blip>
-          <a:stretch>
-            <a:fillRect/>
-          </a:stretch>
-        </p:blipFill>
-        <p:spPr>
-          <a:xfrm>
-            <a:off x="14897481" y="1411069"/>
-            <a:ext cx="618515" cy="618515"/>
-          </a:xfrm>
-          <a:prstGeom prst="rect">
-            <a:avLst/>
-          </a:prstGeom>
-        </p:spPr>
-      </p:pic>
+      </p:sp>
     </p:spTree>
   </p:cSld>
   <p:clrMapOvr>
@@ -8474,319 +7834,4 @@
     </a:ext>
   </a:extLst>
 </a:theme>
-</file>
-
-<file path=ppt/theme/theme2.xml><?xml version="1.0" encoding="utf-8"?>
-<a:theme xmlns:a="http://schemas.openxmlformats.org/drawingml/2006/main" name="Office 主题​​">
-  <a:themeElements>
-    <a:clrScheme name="Office">
-      <a:dk1>
-        <a:sysClr val="windowText" lastClr="000000"/>
-      </a:dk1>
-      <a:lt1>
-        <a:sysClr val="window" lastClr="FFFFFF"/>
-      </a:lt1>
-      <a:dk2>
-        <a:srgbClr val="0E2841"/>
-      </a:dk2>
-      <a:lt2>
-        <a:srgbClr val="E8E8E8"/>
-      </a:lt2>
-      <a:accent1>
-        <a:srgbClr val="156082"/>
-      </a:accent1>
-      <a:accent2>
-        <a:srgbClr val="E97132"/>
-      </a:accent2>
-      <a:accent3>
-        <a:srgbClr val="196B24"/>
-      </a:accent3>
-      <a:accent4>
-        <a:srgbClr val="0F9ED5"/>
-      </a:accent4>
-      <a:accent5>
-        <a:srgbClr val="A02B93"/>
-      </a:accent5>
-      <a:accent6>
-        <a:srgbClr val="4EA72E"/>
-      </a:accent6>
-      <a:hlink>
-        <a:srgbClr val="467886"/>
-      </a:hlink>
-      <a:folHlink>
-        <a:srgbClr val="96607D"/>
-      </a:folHlink>
-    </a:clrScheme>
-    <a:fontScheme name="Office">
-      <a:majorFont>
-        <a:latin typeface="等线 Light" panose="02110004020202020204"/>
-        <a:ea typeface=""/>
-        <a:cs typeface=""/>
-        <a:font script="Jpan" typeface="游ゴシック Light"/>
-        <a:font script="Hang" typeface="맑은 고딕"/>
-        <a:font script="Hans" typeface="等线 Light"/>
-        <a:font script="Hant" typeface="新細明體"/>
-        <a:font script="Arab" typeface="Times New Roman"/>
-        <a:font script="Hebr" typeface="Times New Roman"/>
-        <a:font script="Thai" typeface="Angsana New"/>
-        <a:font script="Ethi" typeface="Nyala"/>
-        <a:font script="Beng" typeface="Vrinda"/>
-        <a:font script="Gujr" typeface="Shruti"/>
-        <a:font script="Khmr" typeface="MoolBoran"/>
-        <a:font script="Knda" typeface="Tunga"/>
-        <a:font script="Guru" typeface="Raavi"/>
-        <a:font script="Cans" typeface="Euphemia"/>
-        <a:font script="Cher" typeface="Plantagenet Cherokee"/>
-        <a:font script="Yiii" typeface="Microsoft Yi Baiti"/>
-        <a:font script="Tibt" typeface="Microsoft Himalaya"/>
-        <a:font script="Thaa" typeface="MV Boli"/>
-        <a:font script="Deva" typeface="Mangal"/>
-        <a:font script="Telu" typeface="Gautami"/>
-        <a:font script="Taml" typeface="Latha"/>
-        <a:font script="Syrc" typeface="Estrangelo Edessa"/>
-        <a:font script="Orya" typeface="Kalinga"/>
-        <a:font script="Mlym" typeface="Kartika"/>
-        <a:font script="Laoo" typeface="DokChampa"/>
-        <a:font script="Sinh" typeface="Iskoola Pota"/>
-        <a:font script="Mong" typeface="Mongolian Baiti"/>
-        <a:font script="Viet" typeface="Times New Roman"/>
-        <a:font script="Uigh" typeface="Microsoft Uighur"/>
-        <a:font script="Geor" typeface="Sylfaen"/>
-        <a:font script="Armn" typeface="Arial"/>
-        <a:font script="Bugi" typeface="Leelawadee UI"/>
-        <a:font script="Bopo" typeface="Microsoft JhengHei"/>
-        <a:font script="Java" typeface="Javanese Text"/>
-        <a:font script="Lisu" typeface="Segoe UI"/>
-        <a:font script="Mymr" typeface="Myanmar Text"/>
-        <a:font script="Nkoo" typeface="Ebrima"/>
-        <a:font script="Olck" typeface="Nirmala UI"/>
-        <a:font script="Osma" typeface="Ebrima"/>
-        <a:font script="Phag" typeface="Phagspa"/>
-        <a:font script="Syrn" typeface="Estrangelo Edessa"/>
-        <a:font script="Syrj" typeface="Estrangelo Edessa"/>
-        <a:font script="Syre" typeface="Estrangelo Edessa"/>
-        <a:font script="Sora" typeface="Nirmala UI"/>
-        <a:font script="Tale" typeface="Microsoft Tai Le"/>
-        <a:font script="Talu" typeface="Microsoft New Tai Lue"/>
-        <a:font script="Tfng" typeface="Ebrima"/>
-      </a:majorFont>
-      <a:minorFont>
-        <a:latin typeface="等线" panose="02110004020202020204"/>
-        <a:ea typeface=""/>
-        <a:cs typeface=""/>
-        <a:font script="Jpan" typeface="游ゴシック"/>
-        <a:font script="Hang" typeface="맑은 고딕"/>
-        <a:font script="Hans" typeface="等线"/>
-        <a:font script="Hant" typeface="新細明體"/>
-        <a:font script="Arab" typeface="Arial"/>
-        <a:font script="Hebr" typeface="Arial"/>
-        <a:font script="Thai" typeface="Cordia New"/>
-        <a:font script="Ethi" typeface="Nyala"/>
-        <a:font script="Beng" typeface="Vrinda"/>
-        <a:font script="Gujr" typeface="Shruti"/>
-        <a:font script="Khmr" typeface="DaunPenh"/>
-        <a:font script="Knda" typeface="Tunga"/>
-        <a:font script="Guru" typeface="Raavi"/>
-        <a:font script="Cans" typeface="Euphemia"/>
-        <a:font script="Cher" typeface="Plantagenet Cherokee"/>
-        <a:font script="Yiii" typeface="Microsoft Yi Baiti"/>
-        <a:font script="Tibt" typeface="Microsoft Himalaya"/>
-        <a:font script="Thaa" typeface="MV Boli"/>
-        <a:font script="Deva" typeface="Mangal"/>
-        <a:font script="Telu" typeface="Gautami"/>
-        <a:font script="Taml" typeface="Latha"/>
-        <a:font script="Syrc" typeface="Estrangelo Edessa"/>
-        <a:font script="Orya" typeface="Kalinga"/>
-        <a:font script="Mlym" typeface="Kartika"/>
-        <a:font script="Laoo" typeface="DokChampa"/>
-        <a:font script="Sinh" typeface="Iskoola Pota"/>
-        <a:font script="Mong" typeface="Mongolian Baiti"/>
-        <a:font script="Viet" typeface="Arial"/>
-        <a:font script="Uigh" typeface="Microsoft Uighur"/>
-        <a:font script="Geor" typeface="Sylfaen"/>
-        <a:font script="Armn" typeface="Arial"/>
-        <a:font script="Bugi" typeface="Leelawadee UI"/>
-        <a:font script="Bopo" typeface="Microsoft JhengHei"/>
-        <a:font script="Java" typeface="Javanese Text"/>
-        <a:font script="Lisu" typeface="Segoe UI"/>
-        <a:font script="Mymr" typeface="Myanmar Text"/>
-        <a:font script="Nkoo" typeface="Ebrima"/>
-        <a:font script="Olck" typeface="Nirmala UI"/>
-        <a:font script="Osma" typeface="Ebrima"/>
-        <a:font script="Phag" typeface="Phagspa"/>
-        <a:font script="Syrn" typeface="Estrangelo Edessa"/>
-        <a:font script="Syrj" typeface="Estrangelo Edessa"/>
-        <a:font script="Syre" typeface="Estrangelo Edessa"/>
-        <a:font script="Sora" typeface="Nirmala UI"/>
-        <a:font script="Tale" typeface="Microsoft Tai Le"/>
-        <a:font script="Talu" typeface="Microsoft New Tai Lue"/>
-        <a:font script="Tfng" typeface="Ebrima"/>
-      </a:minorFont>
-    </a:fontScheme>
-    <a:fmtScheme name="Office">
-      <a:fillStyleLst>
-        <a:solidFill>
-          <a:schemeClr val="phClr"/>
-        </a:solidFill>
-        <a:gradFill rotWithShape="1">
-          <a:gsLst>
-            <a:gs pos="0">
-              <a:schemeClr val="phClr">
-                <a:lumMod val="110000"/>
-                <a:satMod val="105000"/>
-                <a:tint val="67000"/>
-              </a:schemeClr>
-            </a:gs>
-            <a:gs pos="50000">
-              <a:schemeClr val="phClr">
-                <a:lumMod val="105000"/>
-                <a:satMod val="103000"/>
-                <a:tint val="73000"/>
-              </a:schemeClr>
-            </a:gs>
-            <a:gs pos="100000">
-              <a:schemeClr val="phClr">
-                <a:lumMod val="105000"/>
-                <a:satMod val="109000"/>
-                <a:tint val="81000"/>
-              </a:schemeClr>
-            </a:gs>
-          </a:gsLst>
-          <a:lin ang="5400000" scaled="0"/>
-        </a:gradFill>
-        <a:gradFill rotWithShape="1">
-          <a:gsLst>
-            <a:gs pos="0">
-              <a:schemeClr val="phClr">
-                <a:satMod val="103000"/>
-                <a:lumMod val="102000"/>
-                <a:tint val="94000"/>
-              </a:schemeClr>
-            </a:gs>
-            <a:gs pos="50000">
-              <a:schemeClr val="phClr">
-                <a:satMod val="110000"/>
-                <a:lumMod val="100000"/>
-                <a:shade val="100000"/>
-              </a:schemeClr>
-            </a:gs>
-            <a:gs pos="100000">
-              <a:schemeClr val="phClr">
-                <a:lumMod val="99000"/>
-                <a:satMod val="120000"/>
-                <a:shade val="78000"/>
-              </a:schemeClr>
-            </a:gs>
-          </a:gsLst>
-          <a:lin ang="5400000" scaled="0"/>
-        </a:gradFill>
-      </a:fillStyleLst>
-      <a:lnStyleLst>
-        <a:ln w="12700" cap="flat" cmpd="sng" algn="ctr">
-          <a:solidFill>
-            <a:schemeClr val="phClr"/>
-          </a:solidFill>
-          <a:prstDash val="solid"/>
-          <a:miter lim="800000"/>
-        </a:ln>
-        <a:ln w="19050" cap="flat" cmpd="sng" algn="ctr">
-          <a:solidFill>
-            <a:schemeClr val="phClr"/>
-          </a:solidFill>
-          <a:prstDash val="solid"/>
-          <a:miter lim="800000"/>
-        </a:ln>
-        <a:ln w="25400" cap="flat" cmpd="sng" algn="ctr">
-          <a:solidFill>
-            <a:schemeClr val="phClr"/>
-          </a:solidFill>
-          <a:prstDash val="solid"/>
-          <a:miter lim="800000"/>
-        </a:ln>
-      </a:lnStyleLst>
-      <a:effectStyleLst>
-        <a:effectStyle>
-          <a:effectLst/>
-        </a:effectStyle>
-        <a:effectStyle>
-          <a:effectLst/>
-        </a:effectStyle>
-        <a:effectStyle>
-          <a:effectLst>
-            <a:outerShdw blurRad="57150" dist="19050" dir="5400000" algn="ctr" rotWithShape="0">
-              <a:srgbClr val="000000">
-                <a:alpha val="63000"/>
-              </a:srgbClr>
-            </a:outerShdw>
-          </a:effectLst>
-        </a:effectStyle>
-      </a:effectStyleLst>
-      <a:bgFillStyleLst>
-        <a:solidFill>
-          <a:schemeClr val="phClr"/>
-        </a:solidFill>
-        <a:solidFill>
-          <a:schemeClr val="phClr">
-            <a:tint val="95000"/>
-            <a:satMod val="170000"/>
-          </a:schemeClr>
-        </a:solidFill>
-        <a:gradFill rotWithShape="1">
-          <a:gsLst>
-            <a:gs pos="0">
-              <a:schemeClr val="phClr">
-                <a:tint val="93000"/>
-                <a:satMod val="150000"/>
-                <a:shade val="98000"/>
-                <a:lumMod val="102000"/>
-              </a:schemeClr>
-            </a:gs>
-            <a:gs pos="50000">
-              <a:schemeClr val="phClr">
-                <a:tint val="98000"/>
-                <a:satMod val="130000"/>
-                <a:shade val="90000"/>
-                <a:lumMod val="103000"/>
-              </a:schemeClr>
-            </a:gs>
-            <a:gs pos="100000">
-              <a:schemeClr val="phClr">
-                <a:shade val="63000"/>
-                <a:satMod val="120000"/>
-              </a:schemeClr>
-            </a:gs>
-          </a:gsLst>
-          <a:lin ang="5400000" scaled="0"/>
-        </a:gradFill>
-      </a:bgFillStyleLst>
-    </a:fmtScheme>
-  </a:themeElements>
-  <a:objectDefaults>
-    <a:lnDef>
-      <a:spPr/>
-      <a:bodyPr/>
-      <a:lstStyle/>
-      <a:style>
-        <a:lnRef idx="2">
-          <a:schemeClr val="accent1"/>
-        </a:lnRef>
-        <a:fillRef idx="0">
-          <a:schemeClr val="accent1"/>
-        </a:fillRef>
-        <a:effectRef idx="1">
-          <a:schemeClr val="accent1"/>
-        </a:effectRef>
-        <a:fontRef idx="minor">
-          <a:schemeClr val="tx1"/>
-        </a:fontRef>
-      </a:style>
-    </a:lnDef>
-  </a:objectDefaults>
-  <a:extraClrSchemeLst/>
-  <a:extLst>
-    <a:ext uri="{05A4C25C-085E-4340-85A3-A5531E510DB2}">
-      <thm15:themeFamily xmlns:thm15="http://schemas.microsoft.com/office/thememl/2012/main" name="Office Theme" id="{2E142A2C-CD16-42D6-873A-C26D2A0506FA}" vid="{1BDDFF52-6CD6-40A5-AB3C-68EB2F1E4D0A}"/>
-    </a:ext>
-  </a:extLst>
-</a:theme>
 </file>